--- a/docs/apresentacao/Repasse_MED_Apresentacao_Medicos.pptx
+++ b/docs/apresentacao/Repasse_MED_Apresentacao_Medicos.pptx
@@ -517,7 +517,7 @@
           <a:lstStyle/>
           <a:p>
             <a:r>
-              <a:t>Apresentar como demonstração funcional com dados fictícios. Não há conexão com o MV nem cálculo oficial de pagamento. Duração sugerida: 8–12 minutos nos slides 1–12. Slides seguintes são apêndices para discussão comercial e de implantação.</a:t>
+              <a:t>Versão atualizada: HonorMed, conforme revisão v2. Controle pessoal, não extrato oficial. Todos os dados são fictícios. Disponibilidade comercial da marca ainda não foi validada. Slides 1–12 para médicos; 13–16 como apêndices.</a:t>
             </a:r>
           </a:p>
         </p:txBody>
@@ -587,7 +587,7 @@
           <a:lstStyle/>
           <a:p>
             <a:r>
-              <a:t>PWA com manifest e service worker implementados. Instalação depende de HTTPS/localhost e navegador compatível e ainda não foi validada em dispositivo físico. Sem conexão, a aplicação exige reconectar para consultar dados; não prometer consulta financeira offline.</a:t>
+              <a:t>PWA e temas implementados. Instalação no dispositivo físico ainda não foi validada. Para consultar dados é necessária conexão. Não há controle financeiro offline. Localhost é acessível apenas no computador do servidor, sem deploy público.</a:t>
             </a:r>
           </a:p>
         </p:txBody>
@@ -657,7 +657,7 @@
           <a:lstStyle/>
           <a:p>
             <a:r>
-              <a:t>R$ 49,90 é hipótese comercial nossa, não preço aprovado ou ativo na aplicação. Não alterar a tela atual nem afirmar contratação disponível. Integração hospitalar não está incluída automaticamente no plano individual: depende de acordo institucional e validação técnica. Histórico só existirá para períodos com dados carregados; exportação não é prometida.</a:t>
+              <a:t>Não fixar preço com o primeiro contato antes de validar utilidade. Valores são hipóteses próprias, não pesquisa de mercado ou contrato aprovado. Recursos avançados de importação são separados da produção pessoal.</a:t>
             </a:r>
           </a:p>
         </p:txBody>
@@ -727,7 +727,7 @@
           <a:lstStyle/>
           <a:p>
             <a:r>
-              <a:t>Trinta dias gratuitos são uma proposta de piloto a aprovar, sem compromisso de implantação em data fixa. Os 30 dias de uso real só começam após os requisitos de segurança e conciliação estarem atendidos. Não anunciar integrações ou descontos garantidos.</a:t>
+              <a:t>Demonstre com dados fictícios agora. Uso pessoal real depende de validar login, permissões e operação. Integração hospitalar exige autorização própria e descoberta HML. Não condicionar a utilidade do registro pessoal a existir um conector.</a:t>
             </a:r>
           </a:p>
         </p:txBody>
@@ -797,7 +797,7 @@
           <a:lstStyle/>
           <a:p>
             <a:r>
-              <a:t>Base: docs/VALIDACAO.md, resultado de 16/10/2026. Não afirmar certificação de segurança, garantia de exatidão hospitalar ou validação em dispositivo físico. Conector MV ausente. Não há fechamento contábil/snapshot histórico; alterações de regras recalculam a previsão.</a:t>
+              <a:t>Resultado em 16/10/2026. Testes SQL usam PostgreSQL PGlite com papel autenticado e RLS. Não há homologação hospitalar, confirmação bancária nem trilha contábil completa. A visão importada é separada para evitar duplicação; não há conciliação automática.</a:t>
             </a:r>
           </a:p>
         </p:txBody>
@@ -867,7 +867,7 @@
           <a:lstStyle/>
           <a:p>
             <a:r>
-              <a:t>Estes valores são hipóteses para negociação e não tabela de mercado, orçamento fechado ou valuation. Licença institucional e permissões administrativas ainda não foram implementadas. Não somar automaticamente a mensalidade institucional à individual: escolher quem contrata e evitar cobrança dupla. Integrações customizadas, rede hospitalar, migração, SLA e esforço fora do escopo devem ser estimados após a Fase 0.</a:t>
+              <a:t>Sugestões anteriores mantidas como hipótese. Não há licença institucional ou painel administrativo implementados. Evitar dupla cobrança individual/institucional. Integração MV/customizações devem ser orçadas após descoberta HML, sem compromisso implícito de entrega por esse valor.</a:t>
             </a:r>
           </a:p>
         </p:txBody>
@@ -937,7 +937,7 @@
           <a:lstStyle/>
           <a:p>
             <a:r>
-              <a:t>Não equiparar o produto a um ERP, prontuário ou sistema de clínica completo. A consulta pública ao iClinic confirma oferta adjacente de gestão/repasse, mas não valida nosso preço. Para avaliar venda integral do software, levantar propriedade intelectual, receita recorrente, contratos, custos, passivos e esforço restante; não inventar um valuation.</a:t>
+              <a:t>Não há base suficiente para valorar venda integral do software. A autonomia pessoal é distinta da integração hospitalar, que tem custos e requisitos próprios.</a:t>
             </a:r>
           </a:p>
         </p:txBody>
@@ -1007,7 +1007,7 @@
           <a:lstStyle/>
           <a:p>
             <a:r>
-              <a:t>Consulta web realizada nesta preparação, em 16/10/2026. Referência de categoria, não comparativo equivalente nem recomendação de concorrente. Valores de Repasse MED são sugestões próprias ainda não aprovadas. Documentos locais: docs/PLANO.md, docs/REGRAS.md, docs/VALIDACAO.md, docs/FASE-3.md e docs/apresentacao/GUIA-APRESENTADOR.md.</a:t>
+              <a:t>Nenhuma integração MV foi implementada ou consultada. Registros pessoais não confirmam faturamento, glosa ou pagamento oficial. A futura integração precisa de reconciliação explícita para evitar duplicidades. Consulte docs/REGRAS.md e GUIA-APRESENTADOR.md.</a:t>
             </a:r>
           </a:p>
         </p:txBody>
@@ -1077,7 +1077,7 @@
           <a:lstStyle/>
           <a:p>
             <a:r>
-              <a:t>Não prometer aumento de renda, recuperação automática de glosas ou economia de tempo já comprovada. O valor do produto é tornar a composição visível e orientar a conferência.</a:t>
+              <a:t>Não prometer renda maior, recuperação automática de glosas ou economia já comprovada. Sem dados pessoais de pacientes e sem acesso ao Oracle.</a:t>
             </a:r>
           </a:p>
         </p:txBody>
@@ -1147,7 +1147,7 @@
           <a:lstStyle/>
           <a:p>
             <a:r>
-              <a:t>No piloto, a configuração contratual deve ser conferida com o financeiro do hospital. Não apresentar o CRM digitado como vínculo de identidade já verificado. Login real Supabase implementado, mas a validação do stack completo está pendente.</a:t>
+              <a:t>Na demo local o botão Entrar não autentica, apenas abre seed. Auth Supabase está implementado mas ainda precisa validação do stack completo. Onboarding não exige vínculo ao MV.</a:t>
             </a:r>
           </a:p>
         </p:txBody>
@@ -1217,7 +1217,7 @@
           <a:lstStyle/>
           <a:p>
             <a:r>
-              <a:t>A captura mostra R$ 7.413,00 de previsão em novembro. São números fictícios, sem significado contratual. Se usar a demo ao vivo, mudanças de regras/importação podem alterar os valores.</a:t>
+              <a:t>Outubro: 24 consultas, 4 sem honorário, produção conhecida R$ 2.245,00, recebido R$ 500,00 e saldo R$ 1.745,00. Todos fictícios. Alterações no seed durante a demo mudam os valores.</a:t>
             </a:r>
           </a:p>
         </p:txBody>
@@ -1287,7 +1287,7 @@
           <a:lstStyle/>
           <a:p>
             <a:r>
-              <a:t>A barra de meta usa previsto + pago. Glosa parcial mantém o saldo líquido na previsão; essa semântica depende da validação do hospital. Não prometer data de depósito nem valor garantido.</a:t>
+              <a:t>Não prometer depósito, conciliação bancária ou exatidão contra o extrato oficial. O excesso recebido em um local não compensa saldo de outro.</a:t>
             </a:r>
           </a:p>
         </p:txBody>
@@ -1357,7 +1357,7 @@
           <a:lstStyle/>
           <a:p>
             <a:r>
-              <a:t>Mostre a navegação Por convênio e depois Atendimentos. Abra o detalhe de uma consulta. Não há nome/CPF do paciente: o identificador de conferência é o código do atendimento.</a:t>
+              <a:t>Um registro representa quantidade, não prontuário nem atendimento hospitalar confirmado. Para evitar duplicidade, corrija a quantidade já lançada em vez de repetir o total do dia.</a:t>
             </a:r>
           </a:p>
         </p:txBody>
@@ -1427,7 +1427,7 @@
           <a:lstStyle/>
           <a:p>
             <a:r>
-              <a:t>Exemplo hipotético, sem relação com contrato real. Dedução é aplicada antes da glosa; arredondamento por atendimento em centavos. Glosa integral resulta em zero. Sem regra resulta em valor pendente, não em repasse confirmado de zero. O cálculo está centralizado em SQL.</a:t>
+              <a:t>Exemplo hipotético. O banco copia o honorário conhecido ao salvar. Configurar honorário preenche os registros ainda sem valor. Alterar a configuração não muda os registros já valorizados; mudar local/convênio de um registro usa o honorário do novo par. A visão importada separada continua oferecendo regra fixa/percentual com vigência.</a:t>
             </a:r>
           </a:p>
         </p:txBody>
@@ -1497,7 +1497,7 @@
           <a:lstStyle/>
           <a:p>
             <a:r>
-              <a:t>Os status atuais vêm dos dados importados ou fictícios. A fonte de cada status e sua atualização automática serão mapeadas com o hospital na integração. Não sugerir que o MVP já confirma liquidação bancária.</a:t>
+              <a:t>Se um depósito abrange vários locais ou meses, registre as parcelas conforme a composição conhecida. Se não souber, confirme a referência antes de atribuir. Não inventar conciliação por consulta.</a:t>
             </a:r>
           </a:p>
         </p:txBody>
@@ -1567,7 +1567,7 @@
           <a:lstStyle/>
           <a:p>
             <a:r>
-              <a:t>Arquivos originais são lidos no navegador; somente campos permitidos são enviados. Cabeçalhos com indicação de dados pessoais são rejeitados. Isso não equivale a certificação LGPD. O código de atendimento ainda requer proteção e governança. RLS foi testado no PostgreSQL; Auth nativo e operação hospedada continuam pendentes.</a:t>
+              <a:t>Não pedir dados de pacientes para configurar. Não afirmar vínculo verificado com hospital por ter cadastrado um local. Sem honorário o registro pessoal já funciona.</a:t>
             </a:r>
           </a:p>
         </p:txBody>
@@ -4615,7 +4615,7 @@
               </a:defRPr>
             </a:pPr>
             <a:r>
-              <a:t>CLAREZA PARA QUEM CUIDA</a:t>
+              <a:t>AUTONOMIA PARA QUEM CUIDA</a:t>
             </a:r>
           </a:p>
         </p:txBody>
@@ -4654,7 +4654,7 @@
               </a:defRPr>
             </a:pPr>
             <a:r>
-              <a:t>Seu trabalho em números.</a:t>
+              <a:t>Suas consultas. Seus recebimentos.</a:t>
             </a:r>
           </a:p>
           <a:p>
@@ -4670,7 +4670,7 @@
               </a:defRPr>
             </a:pPr>
             <a:r>
-              <a:t>Seu repasse com mais clareza.</a:t>
+              <a:t>Seu próprio controle.</a:t>
             </a:r>
           </a:p>
         </p:txBody>
@@ -4709,7 +4709,7 @@
               </a:defRPr>
             </a:pPr>
             <a:r>
-              <a:t>REPASSE MED  /  Demonstração com dados fictícios · Out/2026</a:t>
+              <a:t>HonorMed  /  Controle pessoal · dados fictícios · Out/2026</a:t>
             </a:r>
           </a:p>
         </p:txBody>
@@ -4761,25 +4761,25 @@
         </p:nvSpPr>
         <p:spPr>
           <a:xfrm>
-            <a:off x="548640" y="2880360"/>
-            <a:ext cx="6400800" cy="914400"/>
-          </a:xfrm>
-          <a:prstGeom prst="rect">
-            <a:avLst/>
-          </a:prstGeom>
-          <a:noFill/>
-        </p:spPr>
-        <p:txBody>
-          <a:bodyPr wrap="square" lIns="9144" rIns="9144" tIns="0" bIns="0">
-            <a:spAutoFit/>
-          </a:bodyPr>
-          <a:lstStyle/>
-          <a:p>
-            <a:pPr>
-              <a:spcAft>
-                <a:spcPts val="900"/>
-              </a:spcAft>
-              <a:defRPr sz="4800" b="1">
+            <a:off x="548640" y="2834640"/>
+            <a:ext cx="7315200" cy="777240"/>
+          </a:xfrm>
+          <a:prstGeom prst="rect">
+            <a:avLst/>
+          </a:prstGeom>
+          <a:noFill/>
+        </p:spPr>
+        <p:txBody>
+          <a:bodyPr wrap="square" lIns="9144" rIns="9144" tIns="0" bIns="0">
+            <a:spAutoFit/>
+          </a:bodyPr>
+          <a:lstStyle/>
+          <a:p>
+            <a:pPr>
+              <a:spcAft>
+                <a:spcPts val="900"/>
+              </a:spcAft>
+              <a:defRPr sz="4600" b="1">
                 <a:solidFill>
                   <a:srgbClr val="FFFFFF"/>
                 </a:solidFill>
@@ -4787,7 +4787,7 @@
               </a:defRPr>
             </a:pPr>
             <a:r>
-              <a:t>Repasse MED</a:t>
+              <a:t>HonorMed</a:t>
             </a:r>
           </a:p>
         </p:txBody>
@@ -4801,7 +4801,7 @@
         <p:spPr>
           <a:xfrm>
             <a:off x="548640" y="3977639"/>
-            <a:ext cx="7315200" cy="1005840"/>
+            <a:ext cx="8046720" cy="1097280"/>
           </a:xfrm>
           <a:prstGeom prst="rect">
             <a:avLst/>
@@ -4826,7 +4826,7 @@
               </a:defRPr>
             </a:pPr>
             <a:r>
-              <a:t>Acompanhe a produção ambulatorial, entenda a previsão</a:t>
+              <a:t>Registre a produção do dia e acompanhe os honorários</a:t>
             </a:r>
           </a:p>
           <a:p>
@@ -4842,7 +4842,7 @@
               </a:defRPr>
             </a:pPr>
             <a:r>
-              <a:t>e identifique o que merece atenção.</a:t>
+              <a:t>sem depender de acesso ao administrativo.</a:t>
             </a:r>
           </a:p>
         </p:txBody>
@@ -4856,7 +4856,7 @@
         <p:spPr>
           <a:xfrm>
             <a:off x="548640" y="5486400"/>
-            <a:ext cx="5669280" cy="475488"/>
+            <a:ext cx="6400800" cy="457200"/>
           </a:xfrm>
           <a:prstGeom prst="roundRect">
             <a:avLst>
@@ -4901,7 +4901,7 @@
         <p:spPr>
           <a:xfrm>
             <a:off x="731520" y="5614416"/>
-            <a:ext cx="5303520" cy="201168"/>
+            <a:ext cx="6035040" cy="228600"/>
           </a:xfrm>
           <a:prstGeom prst="rect">
             <a:avLst/>
@@ -4926,7 +4926,7 @@
               </a:defRPr>
             </a:pPr>
             <a:r>
-              <a:t>APRESENTAÇÃO DO MVP  •  VALIDAÇÃO COM MÉDICOS</a:t>
+              <a:t>DEMONSTRAÇÃO DO MVP  •  CONTROLE PESSOAL</a:t>
             </a:r>
           </a:p>
         </p:txBody>
@@ -4939,8 +4939,8 @@
         </p:nvSpPr>
         <p:spPr>
           <a:xfrm>
-            <a:off x="9281160" y="1920240"/>
-            <a:ext cx="1965960" cy="3566160"/>
+            <a:off x="9418320" y="2103120"/>
+            <a:ext cx="1920240" cy="3337560"/>
           </a:xfrm>
           <a:prstGeom prst="roundRect">
             <a:avLst>
@@ -4984,25 +4984,25 @@
         </p:nvSpPr>
         <p:spPr>
           <a:xfrm>
-            <a:off x="9509760" y="2468880"/>
-            <a:ext cx="1554480" cy="2560320"/>
-          </a:xfrm>
-          <a:prstGeom prst="rect">
-            <a:avLst/>
-          </a:prstGeom>
-          <a:noFill/>
-        </p:spPr>
-        <p:txBody>
-          <a:bodyPr wrap="square" lIns="9144" rIns="9144" tIns="0" bIns="0">
-            <a:spAutoFit/>
-          </a:bodyPr>
-          <a:lstStyle/>
-          <a:p>
-            <a:pPr>
-              <a:spcAft>
-                <a:spcPts val="900"/>
-              </a:spcAft>
-              <a:defRPr sz="2300" b="1">
+            <a:off x="9601200" y="2697480"/>
+            <a:ext cx="1645920" cy="2194560"/>
+          </a:xfrm>
+          <a:prstGeom prst="rect">
+            <a:avLst/>
+          </a:prstGeom>
+          <a:noFill/>
+        </p:spPr>
+        <p:txBody>
+          <a:bodyPr wrap="square" lIns="9144" rIns="9144" tIns="0" bIns="0">
+            <a:spAutoFit/>
+          </a:bodyPr>
+          <a:lstStyle/>
+          <a:p>
+            <a:pPr>
+              <a:spcAft>
+                <a:spcPts val="900"/>
+              </a:spcAft>
+              <a:defRPr sz="2100" b="1">
                 <a:solidFill>
                   <a:srgbClr val="FFFFFF"/>
                 </a:solidFill>
@@ -5010,6 +5010,22 @@
               </a:defRPr>
             </a:pPr>
             <a:r>
+              <a:t>REGISTRAR</a:t>
+            </a:r>
+          </a:p>
+          <a:p>
+            <a:pPr>
+              <a:spcAft>
+                <a:spcPts val="900"/>
+              </a:spcAft>
+              <a:defRPr sz="2100" b="1">
+                <a:solidFill>
+                  <a:srgbClr val="FFFFFF"/>
+                </a:solidFill>
+                <a:latin typeface="Bricolage Grotesque"/>
+              </a:defRPr>
+            </a:pPr>
+            <a:r>
               <a:t>PREVER</a:t>
             </a:r>
           </a:p>
@@ -5018,7 +5034,7 @@
               <a:spcAft>
                 <a:spcPts val="900"/>
               </a:spcAft>
-              <a:defRPr sz="2300" b="1">
+              <a:defRPr sz="2100" b="1">
                 <a:solidFill>
                   <a:srgbClr val="FFFFFF"/>
                 </a:solidFill>
@@ -5027,22 +5043,6 @@
             </a:pPr>
             <a:r>
               <a:t>CONFERIR</a:t>
-            </a:r>
-          </a:p>
-          <a:p>
-            <a:pPr>
-              <a:spcAft>
-                <a:spcPts val="900"/>
-              </a:spcAft>
-              <a:defRPr sz="2300" b="1">
-                <a:solidFill>
-                  <a:srgbClr val="FFFFFF"/>
-                </a:solidFill>
-                <a:latin typeface="Bricolage Grotesque"/>
-              </a:defRPr>
-            </a:pPr>
-            <a:r>
-              <a:t>PLANEJAR</a:t>
             </a:r>
           </a:p>
         </p:txBody>
@@ -5107,7 +5107,7 @@
               </a:defRPr>
             </a:pPr>
             <a:r>
-              <a:t>NO CELULAR OU NO COMPUTADOR</a:t>
+              <a:t>NO CELULAR E NO COMPUTADOR</a:t>
             </a:r>
           </a:p>
         </p:txBody>
@@ -5146,7 +5146,7 @@
               </a:defRPr>
             </a:pPr>
             <a:r>
-              <a:t>Uma experiência para a rotina do médico.</a:t>
+              <a:t>O seu controle acompanha a sua rotina.</a:t>
             </a:r>
           </a:p>
         </p:txBody>
@@ -5185,7 +5185,7 @@
               </a:defRPr>
             </a:pPr>
             <a:r>
-              <a:t>Interface responsiva, com navegação adaptada ao tamanho da tela.</a:t>
+              <a:t>Quatro áreas: Início, Produção, Recebimentos e Ajustes.</a:t>
             </a:r>
           </a:p>
         </p:txBody>
@@ -5224,7 +5224,7 @@
               </a:defRPr>
             </a:pPr>
             <a:r>
-              <a:t>REPASSE MED  /  Demonstração com dados fictícios · Out/2026</a:t>
+              <a:t>HonorMed  /  Controle pessoal · dados fictícios · Out/2026</a:t>
             </a:r>
           </a:p>
         </p:txBody>
@@ -5315,7 +5315,7 @@
       </p:sp>
       <p:pic>
         <p:nvPicPr>
-          <p:cNvPr id="8" name="Picture 7" descr="dashboard-mobile.png"/>
+          <p:cNvPr id="8" name="Picture 7" descr="personal-dashboard-mobile.png"/>
           <p:cNvPicPr>
             <a:picLocks noChangeAspect="1"/>
           </p:cNvPicPr>
@@ -5323,7 +5323,7 @@
         </p:nvPicPr>
         <p:blipFill>
           <a:blip r:embed="rId2"/>
-          <a:srcRect b="72068"/>
+          <a:srcRect b="76422"/>
           <a:stretch>
             <a:fillRect/>
           </a:stretch>
@@ -5346,8 +5346,8 @@
         </p:nvSpPr>
         <p:spPr>
           <a:xfrm>
-            <a:off x="4023360" y="2606040"/>
-            <a:ext cx="6858000" cy="548640"/>
+            <a:off x="4023360" y="2651760"/>
+            <a:ext cx="6949440" cy="548640"/>
           </a:xfrm>
           <a:prstGeom prst="rect">
             <a:avLst/>
@@ -5372,7 +5372,7 @@
               </a:defRPr>
             </a:pPr>
             <a:r>
-              <a:t>Celular</a:t>
+              <a:t>No celular</a:t>
             </a:r>
           </a:p>
         </p:txBody>
@@ -5385,25 +5385,25 @@
         </p:nvSpPr>
         <p:spPr>
           <a:xfrm>
-            <a:off x="4023360" y="3337560"/>
-            <a:ext cx="6858000" cy="914400"/>
-          </a:xfrm>
-          <a:prstGeom prst="rect">
-            <a:avLst/>
-          </a:prstGeom>
-          <a:noFill/>
-        </p:spPr>
-        <p:txBody>
-          <a:bodyPr wrap="square" lIns="9144" rIns="9144" tIns="0" bIns="0">
-            <a:spAutoFit/>
-          </a:bodyPr>
-          <a:lstStyle/>
-          <a:p>
-            <a:pPr>
-              <a:spcAft>
-                <a:spcPts val="900"/>
-              </a:spcAft>
-              <a:defRPr sz="2200" b="0">
+            <a:off x="4023360" y="3383280"/>
+            <a:ext cx="6949440" cy="914400"/>
+          </a:xfrm>
+          <a:prstGeom prst="rect">
+            <a:avLst/>
+          </a:prstGeom>
+          <a:noFill/>
+        </p:spPr>
+        <p:txBody>
+          <a:bodyPr wrap="square" lIns="9144" rIns="9144" tIns="0" bIns="0">
+            <a:spAutoFit/>
+          </a:bodyPr>
+          <a:lstStyle/>
+          <a:p>
+            <a:pPr>
+              <a:spcAft>
+                <a:spcPts val="900"/>
+              </a:spcAft>
+              <a:defRPr sz="2100" b="0">
                 <a:solidFill>
                   <a:srgbClr val="0E1F1B"/>
                 </a:solidFill>
@@ -5411,15 +5411,15 @@
               </a:defRPr>
             </a:pPr>
             <a:r>
-              <a:t>Resumo financeiro e navegação inferior</a:t>
-            </a:r>
-          </a:p>
-          <a:p>
-            <a:pPr>
-              <a:spcAft>
-                <a:spcPts val="900"/>
-              </a:spcAft>
-              <a:defRPr sz="2200" b="0">
+              <a:t>Registre a produção ao final do dia</a:t>
+            </a:r>
+          </a:p>
+          <a:p>
+            <a:pPr>
+              <a:spcAft>
+                <a:spcPts val="900"/>
+              </a:spcAft>
+              <a:defRPr sz="2100" b="0">
                 <a:solidFill>
                   <a:srgbClr val="0E1F1B"/>
                 </a:solidFill>
@@ -5427,7 +5427,7 @@
               </a:defRPr>
             </a:pPr>
             <a:r>
-              <a:t>para consultar em poucos toques.</a:t>
+              <a:t>e consulte seus números em poucos toques.</a:t>
             </a:r>
           </a:p>
         </p:txBody>
@@ -5441,7 +5441,7 @@
         <p:spPr>
           <a:xfrm>
             <a:off x="4023360" y="4617720"/>
-            <a:ext cx="6858000" cy="548640"/>
+            <a:ext cx="6949440" cy="548640"/>
           </a:xfrm>
           <a:prstGeom prst="rect">
             <a:avLst/>
@@ -5466,7 +5466,7 @@
               </a:defRPr>
             </a:pPr>
             <a:r>
-              <a:t>Computador</a:t>
+              <a:t>No computador</a:t>
             </a:r>
           </a:p>
         </p:txBody>
@@ -5480,24 +5480,24 @@
         <p:spPr>
           <a:xfrm>
             <a:off x="4023360" y="5349240"/>
-            <a:ext cx="6858000" cy="914400"/>
-          </a:xfrm>
-          <a:prstGeom prst="rect">
-            <a:avLst/>
-          </a:prstGeom>
-          <a:noFill/>
-        </p:spPr>
-        <p:txBody>
-          <a:bodyPr wrap="square" lIns="9144" rIns="9144" tIns="0" bIns="0">
-            <a:spAutoFit/>
-          </a:bodyPr>
-          <a:lstStyle/>
-          <a:p>
-            <a:pPr>
-              <a:spcAft>
-                <a:spcPts val="900"/>
-              </a:spcAft>
-              <a:defRPr sz="2200" b="0">
+            <a:ext cx="6949440" cy="914400"/>
+          </a:xfrm>
+          <a:prstGeom prst="rect">
+            <a:avLst/>
+          </a:prstGeom>
+          <a:noFill/>
+        </p:spPr>
+        <p:txBody>
+          <a:bodyPr wrap="square" lIns="9144" rIns="9144" tIns="0" bIns="0">
+            <a:spAutoFit/>
+          </a:bodyPr>
+          <a:lstStyle/>
+          <a:p>
+            <a:pPr>
+              <a:spcAft>
+                <a:spcPts val="900"/>
+              </a:spcAft>
+              <a:defRPr sz="2100" b="0">
                 <a:solidFill>
                   <a:srgbClr val="0E1F1B"/>
                 </a:solidFill>
@@ -5505,15 +5505,15 @@
               </a:defRPr>
             </a:pPr>
             <a:r>
-              <a:t>Mais espaço para comparar convênios</a:t>
-            </a:r>
-          </a:p>
-          <a:p>
-            <a:pPr>
-              <a:spcAft>
-                <a:spcPts val="900"/>
-              </a:spcAft>
-              <a:defRPr sz="2200" b="0">
+              <a:t>Filtre registros e confira os valores</a:t>
+            </a:r>
+          </a:p>
+          <a:p>
+            <a:pPr>
+              <a:spcAft>
+                <a:spcPts val="900"/>
+              </a:spcAft>
+              <a:defRPr sz="2100" b="0">
                 <a:solidFill>
                   <a:srgbClr val="0E1F1B"/>
                 </a:solidFill>
@@ -5521,7 +5521,7 @@
               </a:defRPr>
             </a:pPr>
             <a:r>
-              <a:t>e investigar os atendimentos.</a:t>
+              <a:t>por local, convênio e data.</a:t>
             </a:r>
           </a:p>
         </p:txBody>
@@ -5586,7 +5586,7 @@
               </a:defRPr>
             </a:pPr>
             <a:r>
-              <a:t>PROPOSTA DE PLANOS · SUJEITA À VALIDAÇÃO</a:t>
+              <a:t>PROPOSTA COMERCIAL · A VALIDAR</a:t>
             </a:r>
           </a:p>
         </p:txBody>
@@ -5625,7 +5625,7 @@
               </a:defRPr>
             </a:pPr>
             <a:r>
-              <a:t>Começar simples. Evoluir com a necessidade.</a:t>
+              <a:t>Começar simples. Evoluir quando fizer sentido.</a:t>
             </a:r>
           </a:p>
         </p:txBody>
@@ -5664,7 +5664,7 @@
               </a:defRPr>
             </a:pPr>
             <a:r>
-              <a:t>Preços sugeridos para lançamento. No MVP, todos os recursos estão liberados e não há cobrança.</a:t>
+              <a:t>No MVP todos os recursos estão liberados. Cobrança e limites por plano não foram implementados.</a:t>
             </a:r>
           </a:p>
         </p:txBody>
@@ -5703,7 +5703,7 @@
               </a:defRPr>
             </a:pPr>
             <a:r>
-              <a:t>REPASSE MED  /  Demonstração com dados fictícios · Out/2026</a:t>
+              <a:t>HonorMed  /  Controle pessoal · dados fictícios · Out/2026</a:t>
             </a:r>
           </a:p>
         </p:txBody>
@@ -5867,7 +5867,7 @@
               </a:defRPr>
             </a:pPr>
             <a:r>
-              <a:t>Free  ·  R$ 0</a:t>
+              <a:t>Free · R$ 0</a:t>
             </a:r>
           </a:p>
         </p:txBody>
@@ -5906,7 +5906,7 @@
               </a:defRPr>
             </a:pPr>
             <a:r>
-              <a:t>Proposta: 1 convênio, competência atual e visão básica da produção.</a:t>
+              <a:t>Proposta: 1 convênio, mês atual e controle básico de produção e recebimentos.</a:t>
             </a:r>
           </a:p>
         </p:txBody>
@@ -6031,7 +6031,7 @@
               </a:defRPr>
             </a:pPr>
             <a:r>
-              <a:t>Pro  ·  R$ 49,90/mês</a:t>
+              <a:t>Pro · R$ 49,90/mês</a:t>
             </a:r>
           </a:p>
         </p:txBody>
@@ -6070,7 +6070,7 @@
               </a:defRPr>
             </a:pPr>
             <a:r>
-              <a:t>Proposta por médico: múltiplos convênios, competências disponíveis, metas, regras e importação.</a:t>
+              <a:t>Proposta por médico: múltiplos locais/convênios e acompanhamento dos meses com dados registrados.</a:t>
             </a:r>
           </a:p>
         </p:txBody>
@@ -6084,24 +6084,24 @@
         <p:spPr>
           <a:xfrm>
             <a:off x="594360" y="5623560"/>
-            <a:ext cx="10789920" cy="457200"/>
-          </a:xfrm>
-          <a:prstGeom prst="rect">
-            <a:avLst/>
-          </a:prstGeom>
-          <a:noFill/>
-        </p:spPr>
-        <p:txBody>
-          <a:bodyPr wrap="square" lIns="9144" rIns="9144" tIns="0" bIns="0">
-            <a:spAutoFit/>
-          </a:bodyPr>
-          <a:lstStyle/>
-          <a:p>
-            <a:pPr>
-              <a:spcAft>
-                <a:spcPts val="900"/>
-              </a:spcAft>
-              <a:defRPr sz="1500" b="0">
+            <a:ext cx="10881360" cy="502920"/>
+          </a:xfrm>
+          <a:prstGeom prst="rect">
+            <a:avLst/>
+          </a:prstGeom>
+          <a:noFill/>
+        </p:spPr>
+        <p:txBody>
+          <a:bodyPr wrap="square" lIns="9144" rIns="9144" tIns="0" bIns="0">
+            <a:spAutoFit/>
+          </a:bodyPr>
+          <a:lstStyle/>
+          <a:p>
+            <a:pPr>
+              <a:spcAft>
+                <a:spcPts val="900"/>
+              </a:spcAft>
+              <a:defRPr sz="1400" b="0">
                 <a:solidFill>
                   <a:srgbClr val="52655F"/>
                 </a:solidFill>
@@ -6109,7 +6109,7 @@
               </a:defRPr>
             </a:pPr>
             <a:r>
-              <a:t>A separação de recursos, limites, atendimento e cobrança ainda será implementada e aprovada.</a:t>
+              <a:t>Preços sugeridos para discussão, sem oferta ativa. Integração hospitalar não está automaticamente incluída.</a:t>
             </a:r>
           </a:p>
         </p:txBody>
@@ -6174,7 +6174,7 @@
               </a:defRPr>
             </a:pPr>
             <a:r>
-              <a:t>CONVITE AO PILOTO</a:t>
+              <a:t>CONVERSA COM O DR. KUDO</a:t>
             </a:r>
           </a:p>
         </p:txBody>
@@ -6213,7 +6213,7 @@
               </a:defRPr>
             </a:pPr>
             <a:r>
-              <a:t>Vamos validar com quem vai usar.</a:t>
+              <a:t>Vamos testar com a rotina de quem vai usar.</a:t>
             </a:r>
           </a:p>
         </p:txBody>
@@ -6252,7 +6252,7 @@
               </a:defRPr>
             </a:pPr>
             <a:r>
-              <a:t>Proposta: grupo inicial de 5 a 10 médicos, com acompanhamento por 30 dias.</a:t>
+              <a:t>Primeiro, entender o dia a dia. Depois, demonstrar com um exemplo simples.</a:t>
             </a:r>
           </a:p>
         </p:txBody>
@@ -6291,7 +6291,7 @@
               </a:defRPr>
             </a:pPr>
             <a:r>
-              <a:t>REPASSE MED  /  Demonstração com dados fictícios · Out/2026</a:t>
+              <a:t>HonorMed  /  Controle pessoal · dados fictícios · Out/2026</a:t>
             </a:r>
           </a:p>
         </p:txBody>
@@ -6416,7 +6416,7 @@
               </a:defRPr>
             </a:pPr>
             <a:r>
-              <a:t>ETAPA 1</a:t>
+              <a:t>01 / ENTENDER</a:t>
             </a:r>
           </a:p>
         </p:txBody>
@@ -6455,7 +6455,7 @@
               </a:defRPr>
             </a:pPr>
             <a:r>
-              <a:t>Demonstração</a:t>
+              <a:t>Como você atende?</a:t>
             </a:r>
           </a:p>
         </p:txBody>
@@ -6494,7 +6494,7 @@
               </a:defRPr>
             </a:pPr>
             <a:r>
-              <a:t>Primeiro encontro com dados fictícios e roteiro guiado.</a:t>
+              <a:t>Um local ou vários? Faz sentido registrar o total ao final do dia?</a:t>
             </a:r>
           </a:p>
         </p:txBody>
@@ -6580,7 +6580,7 @@
               </a:defRPr>
             </a:pPr>
             <a:r>
-              <a:t>ETAPA 2</a:t>
+              <a:t>02 / DEMONSTRAR</a:t>
             </a:r>
           </a:p>
         </p:txBody>
@@ -6619,7 +6619,7 @@
               </a:defRPr>
             </a:pPr>
             <a:r>
-              <a:t>Validação controlada</a:t>
+              <a:t>Uma rotina completa</a:t>
             </a:r>
           </a:p>
         </p:txBody>
@@ -6658,7 +6658,7 @@
               </a:defRPr>
             </a:pPr>
             <a:r>
-              <a:t>Dados reais somente após aprovação do hospital, autenticação validada e regras conferidas.</a:t>
+              <a:t>Registrar consultas → acompanhar produção → informar recebimento.</a:t>
             </a:r>
           </a:p>
         </p:txBody>
@@ -6744,7 +6744,7 @@
               </a:defRPr>
             </a:pPr>
             <a:r>
-              <a:t>ETAPA 3</a:t>
+              <a:t>03 / VALIDAR</a:t>
             </a:r>
           </a:p>
         </p:txBody>
@@ -6783,7 +6783,7 @@
               </a:defRPr>
             </a:pPr>
             <a:r>
-              <a:t>Decisão conjunta</a:t>
+              <a:t>O que faltou?</a:t>
             </a:r>
           </a:p>
         </p:txBody>
@@ -6822,7 +6822,7 @@
               </a:defRPr>
             </a:pPr>
             <a:r>
-              <a:t>Medir clareza, divergências, tempo de conferência e interesse no plano Pro.</a:t>
+              <a:t>Foi simples? O saldo ajudou? O que faria você continuar usando?</a:t>
             </a:r>
           </a:p>
         </p:txBody>
@@ -6836,32 +6836,32 @@
         <p:spPr>
           <a:xfrm>
             <a:off x="594360" y="5669280"/>
-            <a:ext cx="10881360" cy="502920"/>
-          </a:xfrm>
-          <a:prstGeom prst="rect">
-            <a:avLst/>
-          </a:prstGeom>
-          <a:noFill/>
-        </p:spPr>
-        <p:txBody>
-          <a:bodyPr wrap="square" lIns="9144" rIns="9144" tIns="0" bIns="0">
-            <a:spAutoFit/>
-          </a:bodyPr>
-          <a:lstStyle/>
-          <a:p>
-            <a:pPr>
-              <a:spcAft>
-                <a:spcPts val="900"/>
-              </a:spcAft>
-              <a:defRPr sz="1900" b="1">
-                <a:solidFill>
-                  <a:srgbClr val="0B7A66"/>
-                </a:solidFill>
-                <a:latin typeface="Manrope"/>
-              </a:defRPr>
-            </a:pPr>
-            <a:r>
-              <a:t>Pergunta central: “Você entende melhor quanto está previsto e o que precisa conferir?”</a:t>
+            <a:ext cx="10881360" cy="548640"/>
+          </a:xfrm>
+          <a:prstGeom prst="rect">
+            <a:avLst/>
+          </a:prstGeom>
+          <a:noFill/>
+        </p:spPr>
+        <p:txBody>
+          <a:bodyPr wrap="square" lIns="9144" rIns="9144" tIns="0" bIns="0">
+            <a:spAutoFit/>
+          </a:bodyPr>
+          <a:lstStyle/>
+          <a:p>
+            <a:pPr>
+              <a:spcAft>
+                <a:spcPts val="900"/>
+              </a:spcAft>
+              <a:defRPr sz="1400" b="0">
+                <a:solidFill>
+                  <a:srgbClr val="52655F"/>
+                </a:solidFill>
+                <a:latin typeface="Manrope"/>
+              </a:defRPr>
+            </a:pPr>
+            <a:r>
+              <a:t>Proposta de piloto: 5–10 médicos, 30 dias de uso controlado após a validação técnica.</a:t>
             </a:r>
           </a:p>
         </p:txBody>
@@ -6926,7 +6926,7 @@
               </a:defRPr>
             </a:pPr>
             <a:r>
-              <a:t>APÊNDICE · SITUAÇÃO DA ENTREGA</a:t>
+              <a:t>APÊNDICE · SITUAÇÃO ATUAL</a:t>
             </a:r>
           </a:p>
         </p:txBody>
@@ -6965,7 +6965,7 @@
               </a:defRPr>
             </a:pPr>
             <a:r>
-              <a:t>Pronto para mostrar. Validações antes de operar.</a:t>
+              <a:t>Demonstrável hoje. Validações antes de operar.</a:t>
             </a:r>
           </a:p>
         </p:txBody>
@@ -7004,7 +7004,7 @@
               </a:defRPr>
             </a:pPr>
             <a:r>
-              <a:t>Use este apêndice na discussão com gestão, TI e responsáveis pelo piloto.</a:t>
+              <a:t>A atualização prioriza autonomia do médico e mantém integração como possibilidade futura.</a:t>
             </a:r>
           </a:p>
         </p:txBody>
@@ -7043,7 +7043,7 @@
               </a:defRPr>
             </a:pPr>
             <a:r>
-              <a:t>REPASSE MED  /  Demonstração com dados fictícios · Out/2026</a:t>
+              <a:t>HonorMed  /  Controle pessoal · dados fictícios · Out/2026</a:t>
             </a:r>
           </a:p>
         </p:txBody>
@@ -7168,7 +7168,7 @@
               </a:defRPr>
             </a:pPr>
             <a:r>
-              <a:t>MVP FUNCIONAL COM DADOS FICTÍCIOS</a:t>
+              <a:t>CONTROLE PESSOAL</a:t>
             </a:r>
           </a:p>
         </p:txBody>
@@ -7207,7 +7207,7 @@
               </a:defRPr>
             </a:pPr>
             <a:r>
-              <a:t>Demonstrável hoje</a:t>
+              <a:t>Disponível no MVP</a:t>
             </a:r>
           </a:p>
         </p:txBody>
@@ -7246,7 +7246,7 @@
               </a:defRPr>
             </a:pPr>
             <a:r>
-              <a:t>Dashboard em duas competências; filtros; regras; metas; importação; cálculo SQL; interface móvel e desktop.</a:t>
+              <a:t>Quantidade por local/convênio; honorário pendente; produção; recebimento parcial; correções; filtros; cálculo SQL.</a:t>
             </a:r>
           </a:p>
         </p:txBody>
@@ -7332,7 +7332,7 @@
               </a:defRPr>
             </a:pPr>
             <a:r>
-              <a:t>CONDIÇÕES PARA OPERAÇÃO</a:t>
+              <a:t>PRÓXIMAS VALIDAÇÕES</a:t>
             </a:r>
           </a:p>
         </p:txBody>
@@ -7371,7 +7371,7 @@
               </a:defRPr>
             </a:pPr>
             <a:r>
-              <a:t>Antes dos dados reais</a:t>
+              <a:t>Antes da operação real</a:t>
             </a:r>
           </a:p>
         </p:txBody>
@@ -7410,7 +7410,7 @@
               </a:defRPr>
             </a:pPr>
             <a:r>
-              <a:t>Validar Auth/Supabase, homologar regras e competência, autorizar tratamento de dados, implantar e conciliar.</a:t>
+              <a:t>Validar Auth/Supabase hospedado, implantação, segurança operacional, suporte e uso em dispositivo físico.</a:t>
             </a:r>
           </a:p>
         </p:txBody>
@@ -7424,7 +7424,7 @@
         <p:spPr>
           <a:xfrm>
             <a:off x="594360" y="5669280"/>
-            <a:ext cx="10881360" cy="502920"/>
+            <a:ext cx="10881360" cy="457200"/>
           </a:xfrm>
           <a:prstGeom prst="rect">
             <a:avLst/>
@@ -7449,7 +7449,7 @@
               </a:defRPr>
             </a:pPr>
             <a:r>
-              <a:t>Registro da entrega: build aprovado · 9 testes SQL/RLS · 4 testes de navegador · sem acesso ao Oracle.</a:t>
+              <a:t>Build aprovado · 19 testes SQL/RLS · 8 testes de navegador · sem conexão Oracle.</a:t>
             </a:r>
           </a:p>
         </p:txBody>
@@ -7514,7 +7514,7 @@
               </a:defRPr>
             </a:pPr>
             <a:r>
-              <a:t>APÊNDICE · MODELO INSTITUCIONAL SUGERIDO</a:t>
+              <a:t>APÊNDICE · PROPOSTA INSTITUCIONAL</a:t>
             </a:r>
           </a:p>
         </p:txBody>
@@ -7553,7 +7553,7 @@
               </a:defRPr>
             </a:pPr>
             <a:r>
-              <a:t>O hospital pode viabilizar o acesso dos médicos.</a:t>
+              <a:t>O hospital pode custear o acesso dos médicos.</a:t>
             </a:r>
           </a:p>
         </p:txBody>
@@ -7592,7 +7592,7 @@
               </a:defRPr>
             </a:pPr>
             <a:r>
-              <a:t>Uma proposta comercial inicial, condicionada à descoberta técnica e ao escopo contratual.</a:t>
+              <a:t>Uma proposta futura condicionada ao escopo e à descoberta técnica.</a:t>
             </a:r>
           </a:p>
         </p:txBody>
@@ -7631,7 +7631,7 @@
               </a:defRPr>
             </a:pPr>
             <a:r>
-              <a:t>REPASSE MED  /  Demonstração com dados fictícios · Out/2026</a:t>
+              <a:t>HonorMed  /  Controle pessoal · dados fictícios · Out/2026</a:t>
             </a:r>
           </a:p>
         </p:txBody>
@@ -7754,7 +7754,7 @@
               </a:defRPr>
             </a:pPr>
             <a:r>
-              <a:t>LICENÇA INSTITUCIONAL · PROPOSTA</a:t>
+              <a:t>REFERÊNCIA COMERCIAL · SUJEITA À APROVAÇÃO</a:t>
             </a:r>
           </a:p>
         </p:txBody>
@@ -7832,7 +7832,7 @@
               </a:defRPr>
             </a:pPr>
             <a:r>
-              <a:t>Referência para até 50 médicos em uma instituição.</a:t>
+              <a:t>Até 50 médicos de uma instituição.</a:t>
             </a:r>
           </a:p>
           <a:p>
@@ -7926,7 +7926,7 @@
               </a:defRPr>
             </a:pPr>
             <a:r>
-              <a:t>• Fonte e escopo dos dados</a:t>
+              <a:t>• Escopo e custos</a:t>
             </a:r>
           </a:p>
           <a:p>
@@ -7942,7 +7942,7 @@
               </a:defRPr>
             </a:pPr>
             <a:r>
-              <a:t>• Trabalho de integração MV</a:t>
+              <a:t>• Integração e autorização</a:t>
             </a:r>
           </a:p>
           <a:p>
@@ -7974,7 +7974,7 @@
               </a:defRPr>
             </a:pPr>
             <a:r>
-              <a:t>• Custos de operação e limites</a:t>
+              <a:t>• Quem paga os acessos</a:t>
             </a:r>
           </a:p>
         </p:txBody>
@@ -8039,7 +8039,7 @@
               </a:defRPr>
             </a:pPr>
             <a:r>
-              <a:t>APÊNDICE · HIPÓTESE COMERCIAL</a:t>
+              <a:t>APÊNDICE · VIABILIDADE</a:t>
             </a:r>
           </a:p>
         </p:txBody>
@@ -8078,7 +8078,7 @@
               </a:defRPr>
             </a:pPr>
             <a:r>
-              <a:t>O que validar antes de fixar os preços.</a:t>
+              <a:t>Validar utilidade antes de fixar preços.</a:t>
             </a:r>
           </a:p>
         </p:txBody>
@@ -8117,7 +8117,7 @@
               </a:defRPr>
             </a:pPr>
             <a:r>
-              <a:t>Preço precisa cobrir operação e suporte e fazer sentido para o médico e para o hospital.</a:t>
+              <a:t>O valor está em autonomia, organização e clareza do próprio controle.</a:t>
             </a:r>
           </a:p>
         </p:txBody>
@@ -8156,7 +8156,7 @@
               </a:defRPr>
             </a:pPr>
             <a:r>
-              <a:t>REPASSE MED  /  Demonstração com dados fictícios · Out/2026</a:t>
+              <a:t>HonorMed  /  Controle pessoal · dados fictícios · Out/2026</a:t>
             </a:r>
           </a:p>
         </p:txBody>
@@ -8281,7 +8281,7 @@
               </a:defRPr>
             </a:pPr>
             <a:r>
-              <a:t>VALIDAÇÃO COM MÉDICOS</a:t>
+              <a:t>USO REAL</a:t>
             </a:r>
           </a:p>
         </p:txBody>
@@ -8320,7 +8320,7 @@
               </a:defRPr>
             </a:pPr>
             <a:r>
-              <a:t>Disposição a pagar</a:t>
+              <a:t>Vale registrar?</a:t>
             </a:r>
           </a:p>
         </p:txBody>
@@ -8359,7 +8359,7 @@
               </a:defRPr>
             </a:pPr>
             <a:r>
-              <a:t>Apresentar R$ 49,90 e perguntar se o valor é compatível com a utilidade percebida.</a:t>
+              <a:t>Medir frequência, dificuldade e tempo para lançar o total do dia.</a:t>
             </a:r>
           </a:p>
         </p:txBody>
@@ -8445,7 +8445,7 @@
               </a:defRPr>
             </a:pPr>
             <a:r>
-              <a:t>VIABILIDADE</a:t>
+              <a:t>PREÇO</a:t>
             </a:r>
           </a:p>
         </p:txBody>
@@ -8484,7 +8484,7 @@
               </a:defRPr>
             </a:pPr>
             <a:r>
-              <a:t>Custo de servir</a:t>
+              <a:t>Faz sentido pagar?</a:t>
             </a:r>
           </a:p>
         </p:txBody>
@@ -8523,7 +8523,7 @@
               </a:defRPr>
             </a:pPr>
             <a:r>
-              <a:t>Estimar hospedagem, suporte, aquisição, tributos e manutenção de integrações.</a:t>
+              <a:t>Testar a hipótese de R$ 49,90/mês sem prometer benefícios comprovados.</a:t>
             </a:r>
           </a:p>
         </p:txBody>
@@ -8609,7 +8609,7 @@
               </a:defRPr>
             </a:pPr>
             <a:r>
-              <a:t>CENÁRIO, NÃO PROJEÇÃO</a:t>
+              <a:t>SUSTENTAÇÃO</a:t>
             </a:r>
           </a:p>
         </p:txBody>
@@ -8648,7 +8648,7 @@
               </a:defRPr>
             </a:pPr>
             <a:r>
-              <a:t>Receita ilustrativa</a:t>
+              <a:t>Quanto custa servir?</a:t>
             </a:r>
           </a:p>
         </p:txBody>
@@ -8687,7 +8687,7 @@
               </a:defRPr>
             </a:pPr>
             <a:r>
-              <a:t>100 assinantes Pro × R$ 49,90 = R$ 4.990/mês de receita bruta.</a:t>
+              <a:t>Estimar hospedagem, suporte, aquisição, tributos e manutenção.</a:t>
             </a:r>
           </a:p>
         </p:txBody>
@@ -8701,7 +8701,7 @@
         <p:spPr>
           <a:xfrm>
             <a:off x="594360" y="5669280"/>
-            <a:ext cx="10789920" cy="502920"/>
+            <a:ext cx="10881360" cy="548640"/>
           </a:xfrm>
           <a:prstGeom prst="rect">
             <a:avLst/>
@@ -8726,7 +8726,7 @@
               </a:defRPr>
             </a:pPr>
             <a:r>
-              <a:t>Não é lucro ou previsão de vendas. Não há estimativa defensável de valor de venda do software nesta fase.</a:t>
+              <a:t>100 assinantes × R$ 49,90 = R$ 4.990/mês de receita bruta. Exemplo, não projeção ou lucro.</a:t>
             </a:r>
           </a:p>
         </p:txBody>
@@ -8791,7 +8791,7 @@
               </a:defRPr>
             </a:pPr>
             <a:r>
-              <a:t>APÊNDICE · REFERÊNCIAS E PREMISSAS</a:t>
+              <a:t>APÊNDICE · LIMITES DA INFORMAÇÃO</a:t>
             </a:r>
           </a:p>
         </p:txBody>
@@ -8830,7 +8830,7 @@
               </a:defRPr>
             </a:pPr>
             <a:r>
-              <a:t>Material de apoio à apresentação.</a:t>
+              <a:t>Seu registro é uma referência pessoal.</a:t>
             </a:r>
           </a:p>
         </p:txBody>
@@ -8869,7 +8869,7 @@
               </a:defRPr>
             </a:pPr>
             <a:r>
-              <a:t>Base da demonstração, limites conhecidos e contexto comercial consultado.</a:t>
+              <a:t>As fontes devem continuar separadas e identificadas.</a:t>
             </a:r>
           </a:p>
         </p:txBody>
@@ -8908,7 +8908,7 @@
               </a:defRPr>
             </a:pPr>
             <a:r>
-              <a:t>REPASSE MED  /  Demonstração com dados fictícios · Out/2026</a:t>
+              <a:t>HonorMed  /  Controle pessoal · dados fictícios · Out/2026</a:t>
             </a:r>
           </a:p>
         </p:txBody>
@@ -8954,14 +8954,100 @@
       </p:sp>
       <p:sp>
         <p:nvSpPr>
-          <p:cNvPr id="7" name="TextBox 6"/>
-          <p:cNvSpPr txBox="1"/>
-          <p:nvPr/>
-        </p:nvSpPr>
-        <p:spPr>
-          <a:xfrm>
-            <a:off x="594360" y="2560320"/>
-            <a:ext cx="5486400" cy="457200"/>
+          <p:cNvPr id="7" name="Rounded Rectangle 6"/>
+          <p:cNvSpPr/>
+          <p:nvPr/>
+        </p:nvSpPr>
+        <p:spPr>
+          <a:xfrm>
+            <a:off x="502920" y="2514600"/>
+            <a:ext cx="5468112" cy="2743200"/>
+          </a:xfrm>
+          <a:prstGeom prst="roundRect">
+            <a:avLst>
+              <a:gd name="adj" fmla="val 12000"/>
+            </a:avLst>
+          </a:prstGeom>
+          <a:solidFill>
+            <a:srgbClr val="FFFFFF"/>
+          </a:solidFill>
+          <a:ln>
+            <a:solidFill>
+              <a:srgbClr val="D5E0DC"/>
+            </a:solidFill>
+          </a:ln>
+        </p:spPr>
+        <p:style>
+          <a:lnRef idx="1">
+            <a:schemeClr val="accent1"/>
+          </a:lnRef>
+          <a:fillRef idx="3">
+            <a:schemeClr val="accent1"/>
+          </a:fillRef>
+          <a:effectRef idx="2">
+            <a:schemeClr val="accent1"/>
+          </a:effectRef>
+          <a:fontRef idx="minor">
+            <a:schemeClr val="lt1"/>
+          </a:fontRef>
+        </p:style>
+        <p:txBody>
+          <a:bodyPr rtlCol="0" anchor="ctr"/>
+          <a:lstStyle/>
+          <a:p>
+            <a:pPr algn="ctr"/>
+          </a:p>
+        </p:txBody>
+      </p:sp>
+      <p:sp>
+        <p:nvSpPr>
+          <p:cNvPr id="8" name="TextBox 7"/>
+          <p:cNvSpPr txBox="1"/>
+          <p:nvPr/>
+        </p:nvSpPr>
+        <p:spPr>
+          <a:xfrm>
+            <a:off x="704088" y="2697480"/>
+            <a:ext cx="5065776" cy="320040"/>
+          </a:xfrm>
+          <a:prstGeom prst="rect">
+            <a:avLst/>
+          </a:prstGeom>
+          <a:noFill/>
+        </p:spPr>
+        <p:txBody>
+          <a:bodyPr wrap="square" lIns="9144" rIns="9144" tIns="0" bIns="0">
+            <a:spAutoFit/>
+          </a:bodyPr>
+          <a:lstStyle/>
+          <a:p>
+            <a:pPr>
+              <a:spcAft>
+                <a:spcPts val="900"/>
+              </a:spcAft>
+              <a:defRPr sz="1100" b="1">
+                <a:solidFill>
+                  <a:srgbClr val="0B7A66"/>
+                </a:solidFill>
+                <a:latin typeface="Manrope"/>
+              </a:defRPr>
+            </a:pPr>
+            <a:r>
+              <a:t>FLUXO PRINCIPAL</a:t>
+            </a:r>
+          </a:p>
+        </p:txBody>
+      </p:sp>
+      <p:sp>
+        <p:nvSpPr>
+          <p:cNvPr id="9" name="TextBox 8"/>
+          <p:cNvSpPr txBox="1"/>
+          <p:nvPr/>
+        </p:nvSpPr>
+        <p:spPr>
+          <a:xfrm>
+            <a:off x="704088" y="3154680"/>
+            <a:ext cx="5065776" cy="640080"/>
           </a:xfrm>
           <a:prstGeom prst="rect">
             <a:avLst/>
@@ -8980,44 +9066,208 @@
               </a:spcAft>
               <a:defRPr sz="2300" b="1">
                 <a:solidFill>
+                  <a:srgbClr val="0E1F1B"/>
+                </a:solidFill>
+                <a:latin typeface="Bricolage Grotesque"/>
+              </a:defRPr>
+            </a:pPr>
+            <a:r>
+              <a:t>Informado por você</a:t>
+            </a:r>
+          </a:p>
+        </p:txBody>
+      </p:sp>
+      <p:sp>
+        <p:nvSpPr>
+          <p:cNvPr id="10" name="TextBox 9"/>
+          <p:cNvSpPr txBox="1"/>
+          <p:nvPr/>
+        </p:nvSpPr>
+        <p:spPr>
+          <a:xfrm>
+            <a:off x="704088" y="3886200"/>
+            <a:ext cx="5065776" cy="1188720"/>
+          </a:xfrm>
+          <a:prstGeom prst="rect">
+            <a:avLst/>
+          </a:prstGeom>
+          <a:noFill/>
+        </p:spPr>
+        <p:txBody>
+          <a:bodyPr wrap="square" lIns="9144" rIns="9144" tIns="0" bIns="0">
+            <a:spAutoFit/>
+          </a:bodyPr>
+          <a:lstStyle/>
+          <a:p>
+            <a:pPr>
+              <a:spcAft>
+                <a:spcPts val="900"/>
+              </a:spcAft>
+              <a:defRPr sz="1600" b="0">
+                <a:solidFill>
+                  <a:srgbClr val="52655F"/>
+                </a:solidFill>
+                <a:latin typeface="Manrope"/>
+              </a:defRPr>
+            </a:pPr>
+            <a:r>
+              <a:t>Produção e recebimentos registrados pelo médico. Sem nome/CPF de paciente. Pode corrigir os próprios lançamentos.</a:t>
+            </a:r>
+          </a:p>
+        </p:txBody>
+      </p:sp>
+      <p:sp>
+        <p:nvSpPr>
+          <p:cNvPr id="11" name="Rounded Rectangle 10"/>
+          <p:cNvSpPr/>
+          <p:nvPr/>
+        </p:nvSpPr>
+        <p:spPr>
+          <a:xfrm>
+            <a:off x="6172200" y="2514600"/>
+            <a:ext cx="5468112" cy="2743200"/>
+          </a:xfrm>
+          <a:prstGeom prst="roundRect">
+            <a:avLst>
+              <a:gd name="adj" fmla="val 12000"/>
+            </a:avLst>
+          </a:prstGeom>
+          <a:solidFill>
+            <a:srgbClr val="FFFFFF"/>
+          </a:solidFill>
+          <a:ln>
+            <a:solidFill>
+              <a:srgbClr val="D5E0DC"/>
+            </a:solidFill>
+          </a:ln>
+        </p:spPr>
+        <p:style>
+          <a:lnRef idx="1">
+            <a:schemeClr val="accent1"/>
+          </a:lnRef>
+          <a:fillRef idx="3">
+            <a:schemeClr val="accent1"/>
+          </a:fillRef>
+          <a:effectRef idx="2">
+            <a:schemeClr val="accent1"/>
+          </a:effectRef>
+          <a:fontRef idx="minor">
+            <a:schemeClr val="lt1"/>
+          </a:fontRef>
+        </p:style>
+        <p:txBody>
+          <a:bodyPr rtlCol="0" anchor="ctr"/>
+          <a:lstStyle/>
+          <a:p>
+            <a:pPr algn="ctr"/>
+          </a:p>
+        </p:txBody>
+      </p:sp>
+      <p:sp>
+        <p:nvSpPr>
+          <p:cNvPr id="12" name="TextBox 11"/>
+          <p:cNvSpPr txBox="1"/>
+          <p:nvPr/>
+        </p:nvSpPr>
+        <p:spPr>
+          <a:xfrm>
+            <a:off x="6373368" y="2697480"/>
+            <a:ext cx="5065776" cy="320040"/>
+          </a:xfrm>
+          <a:prstGeom prst="rect">
+            <a:avLst/>
+          </a:prstGeom>
+          <a:noFill/>
+        </p:spPr>
+        <p:txBody>
+          <a:bodyPr wrap="square" lIns="9144" rIns="9144" tIns="0" bIns="0">
+            <a:spAutoFit/>
+          </a:bodyPr>
+          <a:lstStyle/>
+          <a:p>
+            <a:pPr>
+              <a:spcAft>
+                <a:spcPts val="900"/>
+              </a:spcAft>
+              <a:defRPr sz="1100" b="1">
+                <a:solidFill>
                   <a:srgbClr val="0B7A66"/>
                 </a:solidFill>
                 <a:latin typeface="Manrope"/>
               </a:defRPr>
             </a:pPr>
             <a:r>
-              <a:t>Produto e demonstração</a:t>
-            </a:r>
-          </a:p>
-        </p:txBody>
-      </p:sp>
-      <p:sp>
-        <p:nvSpPr>
-          <p:cNvPr id="8" name="TextBox 7"/>
-          <p:cNvSpPr txBox="1"/>
-          <p:nvPr/>
-        </p:nvSpPr>
-        <p:spPr>
-          <a:xfrm>
-            <a:off x="594360" y="3154680"/>
-            <a:ext cx="10789920" cy="1280160"/>
-          </a:xfrm>
-          <a:prstGeom prst="rect">
-            <a:avLst/>
-          </a:prstGeom>
-          <a:noFill/>
-        </p:spPr>
-        <p:txBody>
-          <a:bodyPr wrap="square" lIns="9144" rIns="9144" tIns="0" bIns="0">
-            <a:spAutoFit/>
-          </a:bodyPr>
-          <a:lstStyle/>
-          <a:p>
-            <a:pPr>
-              <a:spcAft>
-                <a:spcPts val="900"/>
-              </a:spcAft>
-              <a:defRPr sz="1800" b="0">
+              <a:t>SEM DUPLICAR PRODUÇÃO</a:t>
+            </a:r>
+          </a:p>
+        </p:txBody>
+      </p:sp>
+      <p:sp>
+        <p:nvSpPr>
+          <p:cNvPr id="13" name="TextBox 12"/>
+          <p:cNvSpPr txBox="1"/>
+          <p:nvPr/>
+        </p:nvSpPr>
+        <p:spPr>
+          <a:xfrm>
+            <a:off x="6373368" y="3154680"/>
+            <a:ext cx="5065776" cy="640080"/>
+          </a:xfrm>
+          <a:prstGeom prst="rect">
+            <a:avLst/>
+          </a:prstGeom>
+          <a:noFill/>
+        </p:spPr>
+        <p:txBody>
+          <a:bodyPr wrap="square" lIns="9144" rIns="9144" tIns="0" bIns="0">
+            <a:spAutoFit/>
+          </a:bodyPr>
+          <a:lstStyle/>
+          <a:p>
+            <a:pPr>
+              <a:spcAft>
+                <a:spcPts val="900"/>
+              </a:spcAft>
+              <a:defRPr sz="2300" b="1">
+                <a:solidFill>
+                  <a:srgbClr val="0E1F1B"/>
+                </a:solidFill>
+                <a:latin typeface="Bricolage Grotesque"/>
+              </a:defRPr>
+            </a:pPr>
+            <a:r>
+              <a:t>Visão importada separada</a:t>
+            </a:r>
+          </a:p>
+        </p:txBody>
+      </p:sp>
+      <p:sp>
+        <p:nvSpPr>
+          <p:cNvPr id="14" name="TextBox 13"/>
+          <p:cNvSpPr txBox="1"/>
+          <p:nvPr/>
+        </p:nvSpPr>
+        <p:spPr>
+          <a:xfrm>
+            <a:off x="6373368" y="3886200"/>
+            <a:ext cx="5065776" cy="1188720"/>
+          </a:xfrm>
+          <a:prstGeom prst="rect">
+            <a:avLst/>
+          </a:prstGeom>
+          <a:noFill/>
+        </p:spPr>
+        <p:txBody>
+          <a:bodyPr wrap="square" lIns="9144" rIns="9144" tIns="0" bIns="0">
+            <a:spAutoFit/>
+          </a:bodyPr>
+          <a:lstStyle/>
+          <a:p>
+            <a:pPr>
+              <a:spcAft>
+                <a:spcPts val="900"/>
+              </a:spcAft>
+              <a:defRPr sz="1600" b="0">
                 <a:solidFill>
                   <a:srgbClr val="52655F"/>
                 </a:solidFill>
@@ -9025,15 +9275,38 @@
               </a:defRPr>
             </a:pPr>
             <a:r>
-              <a:t>Plano do projeto e regras do MVP</a:t>
-            </a:r>
-          </a:p>
-          <a:p>
-            <a:pPr>
-              <a:spcAft>
-                <a:spcPts val="900"/>
-              </a:spcAft>
-              <a:defRPr sz="1800" b="0">
+              <a:t>CSV/XLSX e regras avançadas em outra área. Os totais não são somados automaticamente ao controle pessoal.</a:t>
+            </a:r>
+          </a:p>
+        </p:txBody>
+      </p:sp>
+      <p:sp>
+        <p:nvSpPr>
+          <p:cNvPr id="15" name="TextBox 14"/>
+          <p:cNvSpPr txBox="1"/>
+          <p:nvPr/>
+        </p:nvSpPr>
+        <p:spPr>
+          <a:xfrm>
+            <a:off x="594360" y="5669280"/>
+            <a:ext cx="10881360" cy="457200"/>
+          </a:xfrm>
+          <a:prstGeom prst="rect">
+            <a:avLst/>
+          </a:prstGeom>
+          <a:noFill/>
+        </p:spPr>
+        <p:txBody>
+          <a:bodyPr wrap="square" lIns="9144" rIns="9144" tIns="0" bIns="0">
+            <a:spAutoFit/>
+          </a:bodyPr>
+          <a:lstStyle/>
+          <a:p>
+            <a:pPr>
+              <a:spcAft>
+                <a:spcPts val="900"/>
+              </a:spcAft>
+              <a:defRPr sz="1500" b="0">
                 <a:solidFill>
                   <a:srgbClr val="52655F"/>
                 </a:solidFill>
@@ -9041,117 +9314,7 @@
               </a:defRPr>
             </a:pPr>
             <a:r>
-              <a:t>Registro de validação: 16/10/2026</a:t>
-            </a:r>
-          </a:p>
-          <a:p>
-            <a:pPr>
-              <a:spcAft>
-                <a:spcPts val="900"/>
-              </a:spcAft>
-              <a:defRPr sz="1800" b="0">
-                <a:solidFill>
-                  <a:srgbClr val="52655F"/>
-                </a:solidFill>
-                <a:latin typeface="Manrope"/>
-              </a:defRPr>
-            </a:pPr>
-            <a:r>
-              <a:t>Capturas reais: outubro/novembro de 2026 (fictícios)</a:t>
-            </a:r>
-          </a:p>
-        </p:txBody>
-      </p:sp>
-      <p:sp>
-        <p:nvSpPr>
-          <p:cNvPr id="9" name="TextBox 8"/>
-          <p:cNvSpPr txBox="1"/>
-          <p:nvPr/>
-        </p:nvSpPr>
-        <p:spPr>
-          <a:xfrm>
-            <a:off x="594360" y="4617720"/>
-            <a:ext cx="10789920" cy="457200"/>
-          </a:xfrm>
-          <a:prstGeom prst="rect">
-            <a:avLst/>
-          </a:prstGeom>
-          <a:noFill/>
-        </p:spPr>
-        <p:txBody>
-          <a:bodyPr wrap="square" lIns="9144" rIns="9144" tIns="0" bIns="0">
-            <a:spAutoFit/>
-          </a:bodyPr>
-          <a:lstStyle/>
-          <a:p>
-            <a:pPr>
-              <a:spcAft>
-                <a:spcPts val="900"/>
-              </a:spcAft>
-              <a:defRPr sz="2300" b="1">
-                <a:solidFill>
-                  <a:srgbClr val="0B7A66"/>
-                </a:solidFill>
-                <a:latin typeface="Manrope"/>
-              </a:defRPr>
-            </a:pPr>
-            <a:r>
-              <a:t>Referência externa de oferta adjacente</a:t>
-            </a:r>
-          </a:p>
-        </p:txBody>
-      </p:sp>
-      <p:sp>
-        <p:nvSpPr>
-          <p:cNvPr id="10" name="TextBox 9"/>
-          <p:cNvSpPr txBox="1"/>
-          <p:nvPr/>
-        </p:nvSpPr>
-        <p:spPr>
-          <a:xfrm>
-            <a:off x="594360" y="5166360"/>
-            <a:ext cx="10789920" cy="731520"/>
-          </a:xfrm>
-          <a:prstGeom prst="rect">
-            <a:avLst/>
-          </a:prstGeom>
-          <a:noFill/>
-        </p:spPr>
-        <p:txBody>
-          <a:bodyPr wrap="square" lIns="9144" rIns="9144" tIns="0" bIns="0">
-            <a:spAutoFit/>
-          </a:bodyPr>
-          <a:lstStyle/>
-          <a:p>
-            <a:pPr>
-              <a:spcAft>
-                <a:spcPts val="900"/>
-              </a:spcAft>
-              <a:defRPr sz="1600" b="0">
-                <a:solidFill>
-                  <a:srgbClr val="52655F"/>
-                </a:solidFill>
-                <a:latin typeface="Manrope"/>
-              </a:defRPr>
-            </a:pPr>
-            <a:r>
-              <a:t>iClinic · Gestão financeira e repasse para profissionais</a:t>
-            </a:r>
-          </a:p>
-          <a:p>
-            <a:pPr>
-              <a:spcAft>
-                <a:spcPts val="900"/>
-              </a:spcAft>
-              <a:defRPr sz="1600" b="0">
-                <a:solidFill>
-                  <a:srgbClr val="52655F"/>
-                </a:solidFill>
-                <a:latin typeface="Manrope"/>
-              </a:defRPr>
-            </a:pPr>
-            <a:r>
-              <a:t>https://site.iclinic.com.br/funcionalidades/gestao-financeira/</a:t>
+              <a:t>Base: plano, regras e registro de validação do projeto · versão de 16/10/2026.</a:t>
             </a:r>
           </a:p>
         </p:txBody>
@@ -9255,7 +9418,7 @@
               </a:defRPr>
             </a:pPr>
             <a:r>
-              <a:t>Mais clareza em três momentos do mês.</a:t>
+              <a:t>Seu controle começa com o que você já sabe.</a:t>
             </a:r>
           </a:p>
         </p:txBody>
@@ -9294,7 +9457,7 @@
               </a:defRPr>
             </a:pPr>
             <a:r>
-              <a:t>Uma visão pessoal da produção, dos valores previstos e dos pontos de atenção.</a:t>
+              <a:t>Uma ferramenta simples para registrar a rotina e acompanhar seus próprios números.</a:t>
             </a:r>
           </a:p>
         </p:txBody>
@@ -9333,7 +9496,7 @@
               </a:defRPr>
             </a:pPr>
             <a:r>
-              <a:t>REPASSE MED  /  Demonstração com dados fictícios · Out/2026</a:t>
+              <a:t>HonorMed  /  Controle pessoal · dados fictícios · Out/2026</a:t>
             </a:r>
           </a:p>
         </p:txBody>
@@ -9458,7 +9621,7 @@
               </a:defRPr>
             </a:pPr>
             <a:r>
-              <a:t>01 / PLANEJAMENTO</a:t>
+              <a:t>01 / REGISTRAR</a:t>
             </a:r>
           </a:p>
         </p:txBody>
@@ -9497,7 +9660,7 @@
               </a:defRPr>
             </a:pPr>
             <a:r>
-              <a:t>Antes de receber</a:t>
+              <a:t>Sem planilha</a:t>
             </a:r>
           </a:p>
         </p:txBody>
@@ -9536,7 +9699,7 @@
               </a:defRPr>
             </a:pPr>
             <a:r>
-              <a:t>Veja a previsão da competência e acompanhe sua meta.</a:t>
+              <a:t>Anote uma consulta ou a quantidade do dia, por local e convênio.</a:t>
             </a:r>
           </a:p>
         </p:txBody>
@@ -9622,7 +9785,7 @@
               </a:defRPr>
             </a:pPr>
             <a:r>
-              <a:t>02 / TRANSPARÊNCIA</a:t>
+              <a:t>02 / PREVER</a:t>
             </a:r>
           </a:p>
         </p:txBody>
@@ -9661,7 +9824,7 @@
               </a:defRPr>
             </a:pPr>
             <a:r>
-              <a:t>Ao conferir</a:t>
+              <a:t>Sem depender de relatório</a:t>
             </a:r>
           </a:p>
         </p:txBody>
@@ -9700,7 +9863,7 @@
               </a:defRPr>
             </a:pPr>
             <a:r>
-              <a:t>Entenda a composição por convênio, regra e atendimento.</a:t>
+              <a:t>Use os honorários conhecidos para estimar sua produção e seu saldo.</a:t>
             </a:r>
           </a:p>
         </p:txBody>
@@ -9786,7 +9949,7 @@
               </a:defRPr>
             </a:pPr>
             <a:r>
-              <a:t>03 / FOCO</a:t>
+              <a:t>03 / CONFERIR</a:t>
             </a:r>
           </a:p>
         </p:txBody>
@@ -9825,7 +9988,7 @@
               </a:defRPr>
             </a:pPr>
             <a:r>
-              <a:t>Ao agir</a:t>
+              <a:t>Sem perder o histórico</a:t>
             </a:r>
           </a:p>
         </p:txBody>
@@ -9864,7 +10027,7 @@
               </a:defRPr>
             </a:pPr>
             <a:r>
-              <a:t>Identifique glosas e consultas sem regra para discutir com o hospital.</a:t>
+              <a:t>Informe os recebimentos e acompanhe o que ainda está previsto.</a:t>
             </a:r>
           </a:p>
         </p:txBody>
@@ -9877,8 +10040,8 @@
         </p:nvSpPr>
         <p:spPr>
           <a:xfrm>
-            <a:off x="594360" y="5715000"/>
-            <a:ext cx="10789920" cy="457200"/>
+            <a:off x="594360" y="5669280"/>
+            <a:ext cx="10881360" cy="548640"/>
           </a:xfrm>
           <a:prstGeom prst="rect">
             <a:avLst/>
@@ -9903,7 +10066,7 @@
               </a:defRPr>
             </a:pPr>
             <a:r>
-              <a:t>Benefícios esperados: menos conferência dispersa e mais previsibilidade. Serão medidos no piloto.</a:t>
+              <a:t>O benefício esperado é autonomia na conferência. Utilidade e tempo de uso serão avaliados no piloto.</a:t>
             </a:r>
           </a:p>
         </p:txBody>
@@ -10007,7 +10170,7 @@
               </a:defRPr>
             </a:pPr>
             <a:r>
-              <a:t>Da entrada à conferência, em seis passos.</a:t>
+              <a:t>Configure uma vez. Registre em poucos passos.</a:t>
             </a:r>
           </a:p>
         </p:txBody>
@@ -10046,7 +10209,7 @@
               </a:defRPr>
             </a:pPr>
             <a:r>
-              <a:t>No dia a dia, o médico acompanha os números; o hospital confirma os dados e as regras.</a:t>
+              <a:t>O médico mantém o próprio controle, sem precisar de código do administrativo.</a:t>
             </a:r>
           </a:p>
         </p:txBody>
@@ -10085,7 +10248,7 @@
               </a:defRPr>
             </a:pPr>
             <a:r>
-              <a:t>REPASSE MED  /  Demonstração com dados fictícios · Out/2026</a:t>
+              <a:t>HonorMed  /  Controle pessoal · dados fictícios · Out/2026</a:t>
             </a:r>
           </a:p>
         </p:txBody>
@@ -10224,24 +10387,24 @@
         <p:spPr>
           <a:xfrm>
             <a:off x="1161288" y="2578608"/>
-            <a:ext cx="2743200" cy="411480"/>
-          </a:xfrm>
-          <a:prstGeom prst="rect">
-            <a:avLst/>
-          </a:prstGeom>
-          <a:noFill/>
-        </p:spPr>
-        <p:txBody>
-          <a:bodyPr wrap="square" lIns="9144" rIns="9144" tIns="0" bIns="0">
-            <a:spAutoFit/>
-          </a:bodyPr>
-          <a:lstStyle/>
-          <a:p>
-            <a:pPr>
-              <a:spcAft>
-                <a:spcPts val="900"/>
-              </a:spcAft>
-              <a:defRPr sz="1900" b="1">
+            <a:ext cx="2743200" cy="438912"/>
+          </a:xfrm>
+          <a:prstGeom prst="rect">
+            <a:avLst/>
+          </a:prstGeom>
+          <a:noFill/>
+        </p:spPr>
+        <p:txBody>
+          <a:bodyPr wrap="square" lIns="9144" rIns="9144" tIns="0" bIns="0">
+            <a:spAutoFit/>
+          </a:bodyPr>
+          <a:lstStyle/>
+          <a:p>
+            <a:pPr>
+              <a:spcAft>
+                <a:spcPts val="900"/>
+              </a:spcAft>
+              <a:defRPr sz="1800" b="1">
                 <a:solidFill>
                   <a:srgbClr val="0E1F1B"/>
                 </a:solidFill>
@@ -10263,7 +10426,7 @@
         <p:spPr>
           <a:xfrm>
             <a:off x="685800" y="3145536"/>
-            <a:ext cx="3246120" cy="694944"/>
+            <a:ext cx="3246120" cy="731520"/>
           </a:xfrm>
           <a:prstGeom prst="rect">
             <a:avLst/>
@@ -10288,7 +10451,7 @@
               </a:defRPr>
             </a:pPr>
             <a:r>
-              <a:t>E-mail e senha. Na demo local, o botão Entrar abre dados fictícios.</a:t>
+              <a:t>E-mail, senha, nome e CRM. Código MV é opcional.</a:t>
             </a:r>
           </a:p>
         </p:txBody>
@@ -10388,24 +10551,24 @@
         <p:spPr>
           <a:xfrm>
             <a:off x="4956048" y="2578608"/>
-            <a:ext cx="2743200" cy="411480"/>
-          </a:xfrm>
-          <a:prstGeom prst="rect">
-            <a:avLst/>
-          </a:prstGeom>
-          <a:noFill/>
-        </p:spPr>
-        <p:txBody>
-          <a:bodyPr wrap="square" lIns="9144" rIns="9144" tIns="0" bIns="0">
-            <a:spAutoFit/>
-          </a:bodyPr>
-          <a:lstStyle/>
-          <a:p>
-            <a:pPr>
-              <a:spcAft>
-                <a:spcPts val="900"/>
-              </a:spcAft>
-              <a:defRPr sz="1900" b="1">
+            <a:ext cx="2743200" cy="438912"/>
+          </a:xfrm>
+          <a:prstGeom prst="rect">
+            <a:avLst/>
+          </a:prstGeom>
+          <a:noFill/>
+        </p:spPr>
+        <p:txBody>
+          <a:bodyPr wrap="square" lIns="9144" rIns="9144" tIns="0" bIns="0">
+            <a:spAutoFit/>
+          </a:bodyPr>
+          <a:lstStyle/>
+          <a:p>
+            <a:pPr>
+              <a:spcAft>
+                <a:spcPts val="900"/>
+              </a:spcAft>
+              <a:defRPr sz="1800" b="1">
                 <a:solidFill>
                   <a:srgbClr val="0E1F1B"/>
                 </a:solidFill>
@@ -10413,7 +10576,7 @@
               </a:defRPr>
             </a:pPr>
             <a:r>
-              <a:t>Complete seu perfil</a:t>
+              <a:t>Cadastre seus locais</a:t>
             </a:r>
           </a:p>
         </p:txBody>
@@ -10427,7 +10590,7 @@
         <p:spPr>
           <a:xfrm>
             <a:off x="4480560" y="3145536"/>
-            <a:ext cx="3246120" cy="694944"/>
+            <a:ext cx="3246120" cy="731520"/>
           </a:xfrm>
           <a:prstGeom prst="rect">
             <a:avLst/>
@@ -10452,7 +10615,7 @@
               </a:defRPr>
             </a:pPr>
             <a:r>
-              <a:t>CRM e código de prestador. Vínculo com o hospital ainda será validado.</a:t>
+              <a:t>Onde atende e quais convênios ou consultas particulares realiza.</a:t>
             </a:r>
           </a:p>
         </p:txBody>
@@ -10552,24 +10715,24 @@
         <p:spPr>
           <a:xfrm>
             <a:off x="8750808" y="2578608"/>
-            <a:ext cx="2743200" cy="411480"/>
-          </a:xfrm>
-          <a:prstGeom prst="rect">
-            <a:avLst/>
-          </a:prstGeom>
-          <a:noFill/>
-        </p:spPr>
-        <p:txBody>
-          <a:bodyPr wrap="square" lIns="9144" rIns="9144" tIns="0" bIns="0">
-            <a:spAutoFit/>
-          </a:bodyPr>
-          <a:lstStyle/>
-          <a:p>
-            <a:pPr>
-              <a:spcAft>
-                <a:spcPts val="900"/>
-              </a:spcAft>
-              <a:defRPr sz="1900" b="1">
+            <a:ext cx="2743200" cy="438912"/>
+          </a:xfrm>
+          <a:prstGeom prst="rect">
+            <a:avLst/>
+          </a:prstGeom>
+          <a:noFill/>
+        </p:spPr>
+        <p:txBody>
+          <a:bodyPr wrap="square" lIns="9144" rIns="9144" tIns="0" bIns="0">
+            <a:spAutoFit/>
+          </a:bodyPr>
+          <a:lstStyle/>
+          <a:p>
+            <a:pPr>
+              <a:spcAft>
+                <a:spcPts val="900"/>
+              </a:spcAft>
+              <a:defRPr sz="1800" b="1">
                 <a:solidFill>
                   <a:srgbClr val="0E1F1B"/>
                 </a:solidFill>
@@ -10577,7 +10740,7 @@
               </a:defRPr>
             </a:pPr>
             <a:r>
-              <a:t>Receba os dados</a:t>
+              <a:t>Informe o honorário</a:t>
             </a:r>
           </a:p>
         </p:txBody>
@@ -10591,7 +10754,7 @@
         <p:spPr>
           <a:xfrm>
             <a:off x="8275320" y="3145536"/>
-            <a:ext cx="3246120" cy="694944"/>
+            <a:ext cx="3246120" cy="731520"/>
           </a:xfrm>
           <a:prstGeom prst="rect">
             <a:avLst/>
@@ -10616,7 +10779,7 @@
               </a:defRPr>
             </a:pPr>
             <a:r>
-              <a:t>Hoje: seed ou importação CSV/XLSX. Integração MV: etapa futura.</a:t>
+              <a:t>Valor esperado por consulta. Pode preencher quando souber.</a:t>
             </a:r>
           </a:p>
         </p:txBody>
@@ -10716,24 +10879,24 @@
         <p:spPr>
           <a:xfrm>
             <a:off x="1161288" y="4361688"/>
-            <a:ext cx="2743200" cy="411480"/>
-          </a:xfrm>
-          <a:prstGeom prst="rect">
-            <a:avLst/>
-          </a:prstGeom>
-          <a:noFill/>
-        </p:spPr>
-        <p:txBody>
-          <a:bodyPr wrap="square" lIns="9144" rIns="9144" tIns="0" bIns="0">
-            <a:spAutoFit/>
-          </a:bodyPr>
-          <a:lstStyle/>
-          <a:p>
-            <a:pPr>
-              <a:spcAft>
-                <a:spcPts val="900"/>
-              </a:spcAft>
-              <a:defRPr sz="1900" b="1">
+            <a:ext cx="2743200" cy="438912"/>
+          </a:xfrm>
+          <a:prstGeom prst="rect">
+            <a:avLst/>
+          </a:prstGeom>
+          <a:noFill/>
+        </p:spPr>
+        <p:txBody>
+          <a:bodyPr wrap="square" lIns="9144" rIns="9144" tIns="0" bIns="0">
+            <a:spAutoFit/>
+          </a:bodyPr>
+          <a:lstStyle/>
+          <a:p>
+            <a:pPr>
+              <a:spcAft>
+                <a:spcPts val="900"/>
+              </a:spcAft>
+              <a:defRPr sz="1800" b="1">
                 <a:solidFill>
                   <a:srgbClr val="0E1F1B"/>
                 </a:solidFill>
@@ -10741,7 +10904,7 @@
               </a:defRPr>
             </a:pPr>
             <a:r>
-              <a:t>Confira as regras</a:t>
+              <a:t>Registre as consultas</a:t>
             </a:r>
           </a:p>
         </p:txBody>
@@ -10755,7 +10918,7 @@
         <p:spPr>
           <a:xfrm>
             <a:off x="685800" y="4928616"/>
-            <a:ext cx="3246120" cy="694944"/>
+            <a:ext cx="3246120" cy="731520"/>
           </a:xfrm>
           <a:prstGeom prst="rect">
             <a:avLst/>
@@ -10780,7 +10943,7 @@
               </a:defRPr>
             </a:pPr>
             <a:r>
-              <a:t>Valor fixo ou percentual, vigência e dedução por convênio.</a:t>
+              <a:t>Data, local, convênio e quantidade. Uma consulta ou total do dia.</a:t>
             </a:r>
           </a:p>
         </p:txBody>
@@ -10880,24 +11043,24 @@
         <p:spPr>
           <a:xfrm>
             <a:off x="4956048" y="4361688"/>
-            <a:ext cx="2743200" cy="411480"/>
-          </a:xfrm>
-          <a:prstGeom prst="rect">
-            <a:avLst/>
-          </a:prstGeom>
-          <a:noFill/>
-        </p:spPr>
-        <p:txBody>
-          <a:bodyPr wrap="square" lIns="9144" rIns="9144" tIns="0" bIns="0">
-            <a:spAutoFit/>
-          </a:bodyPr>
-          <a:lstStyle/>
-          <a:p>
-            <a:pPr>
-              <a:spcAft>
-                <a:spcPts val="900"/>
-              </a:spcAft>
-              <a:defRPr sz="1900" b="1">
+            <a:ext cx="2743200" cy="438912"/>
+          </a:xfrm>
+          <a:prstGeom prst="rect">
+            <a:avLst/>
+          </a:prstGeom>
+          <a:noFill/>
+        </p:spPr>
+        <p:txBody>
+          <a:bodyPr wrap="square" lIns="9144" rIns="9144" tIns="0" bIns="0">
+            <a:spAutoFit/>
+          </a:bodyPr>
+          <a:lstStyle/>
+          <a:p>
+            <a:pPr>
+              <a:spcAft>
+                <a:spcPts val="900"/>
+              </a:spcAft>
+              <a:defRPr sz="1800" b="1">
                 <a:solidFill>
                   <a:srgbClr val="0E1F1B"/>
                 </a:solidFill>
@@ -10905,7 +11068,7 @@
               </a:defRPr>
             </a:pPr>
             <a:r>
-              <a:t>Escolha a competência</a:t>
+              <a:t>Registre recebimentos</a:t>
             </a:r>
           </a:p>
         </p:txBody>
@@ -10919,7 +11082,7 @@
         <p:spPr>
           <a:xfrm>
             <a:off x="4480560" y="4928616"/>
-            <a:ext cx="3246120" cy="694944"/>
+            <a:ext cx="3246120" cy="731520"/>
           </a:xfrm>
           <a:prstGeom prst="rect">
             <a:avLst/>
@@ -10944,7 +11107,7 @@
               </a:defRPr>
             </a:pPr>
             <a:r>
-              <a:t>Veja a previsão, o que já foi pago e a evolução da meta.</a:t>
+              <a:t>Valor, local, mês da produção e data em que recebeu.</a:t>
             </a:r>
           </a:p>
         </p:txBody>
@@ -11044,24 +11207,24 @@
         <p:spPr>
           <a:xfrm>
             <a:off x="8750808" y="4361688"/>
-            <a:ext cx="2743200" cy="411480"/>
-          </a:xfrm>
-          <a:prstGeom prst="rect">
-            <a:avLst/>
-          </a:prstGeom>
-          <a:noFill/>
-        </p:spPr>
-        <p:txBody>
-          <a:bodyPr wrap="square" lIns="9144" rIns="9144" tIns="0" bIns="0">
-            <a:spAutoFit/>
-          </a:bodyPr>
-          <a:lstStyle/>
-          <a:p>
-            <a:pPr>
-              <a:spcAft>
-                <a:spcPts val="900"/>
-              </a:spcAft>
-              <a:defRPr sz="1900" b="1">
+            <a:ext cx="2743200" cy="438912"/>
+          </a:xfrm>
+          <a:prstGeom prst="rect">
+            <a:avLst/>
+          </a:prstGeom>
+          <a:noFill/>
+        </p:spPr>
+        <p:txBody>
+          <a:bodyPr wrap="square" lIns="9144" rIns="9144" tIns="0" bIns="0">
+            <a:spAutoFit/>
+          </a:bodyPr>
+          <a:lstStyle/>
+          <a:p>
+            <a:pPr>
+              <a:spcAft>
+                <a:spcPts val="900"/>
+              </a:spcAft>
+              <a:defRPr sz="1800" b="1">
                 <a:solidFill>
                   <a:srgbClr val="0E1F1B"/>
                 </a:solidFill>
@@ -11069,7 +11232,7 @@
               </a:defRPr>
             </a:pPr>
             <a:r>
-              <a:t>Investigue os detalhes</a:t>
+              <a:t>Acompanhe o saldo</a:t>
             </a:r>
           </a:p>
         </p:txBody>
@@ -11083,7 +11246,7 @@
         <p:spPr>
           <a:xfrm>
             <a:off x="8275320" y="4928616"/>
-            <a:ext cx="3246120" cy="694944"/>
+            <a:ext cx="3246120" cy="731520"/>
           </a:xfrm>
           <a:prstGeom prst="rect">
             <a:avLst/>
@@ -11108,7 +11271,7 @@
               </a:defRPr>
             </a:pPr>
             <a:r>
-              <a:t>Filtre atendimentos e confira glosas ou valores sem regra.</a:t>
+              <a:t>Veja a previsão, consultas sem valor e os detalhes dos registros.</a:t>
             </a:r>
           </a:p>
         </p:txBody>
@@ -11173,7 +11336,7 @@
               </a:defRPr>
             </a:pPr>
             <a:r>
-              <a:t>PAINEL PRINCIPAL</a:t>
+              <a:t>PAINEL PESSOAL</a:t>
             </a:r>
           </a:p>
         </p:txBody>
@@ -11212,7 +11375,7 @@
               </a:defRPr>
             </a:pPr>
             <a:r>
-              <a:t>O essencial aparece primeiro.</a:t>
+              <a:t>Duas ações. Seus números em primeiro lugar.</a:t>
             </a:r>
           </a:p>
         </p:txBody>
@@ -11251,7 +11414,7 @@
               </a:defRPr>
             </a:pPr>
             <a:r>
-              <a:t>Captura real do MVP · novembro de 2026 · dados fictícios.</a:t>
+              <a:t>Captura real do MVP · outubro de 2026 · dados fictícios.</a:t>
             </a:r>
           </a:p>
         </p:txBody>
@@ -11290,7 +11453,7 @@
               </a:defRPr>
             </a:pPr>
             <a:r>
-              <a:t>REPASSE MED  /  Demonstração com dados fictícios · Out/2026</a:t>
+              <a:t>HonorMed  /  Controle pessoal · dados fictícios · Out/2026</a:t>
             </a:r>
           </a:p>
         </p:txBody>
@@ -11336,7 +11499,7 @@
       </p:sp>
       <p:pic>
         <p:nvPicPr>
-          <p:cNvPr id="7" name="Picture 6" descr="dashboard-desktop.png"/>
+          <p:cNvPr id="7" name="Picture 6" descr="personal-dashboard-desktop.png"/>
           <p:cNvPicPr>
             <a:picLocks noChangeAspect="1"/>
           </p:cNvPicPr>
@@ -11344,7 +11507,7 @@
         </p:nvPicPr>
         <p:blipFill>
           <a:blip r:embed="rId2"/>
-          <a:srcRect b="59615"/>
+          <a:srcRect b="57658"/>
           <a:stretch>
             <a:fillRect/>
           </a:stretch>
@@ -11368,7 +11531,7 @@
         <p:spPr>
           <a:xfrm>
             <a:off x="8366760" y="2560320"/>
-            <a:ext cx="3108960" cy="365760"/>
+            <a:ext cx="3108960" cy="411480"/>
           </a:xfrm>
           <a:prstGeom prst="rect">
             <a:avLst/>
@@ -11393,7 +11556,7 @@
               </a:defRPr>
             </a:pPr>
             <a:r>
-              <a:t>01  A receber</a:t>
+              <a:t>Registrar consultas</a:t>
             </a:r>
           </a:p>
         </p:txBody>
@@ -11406,8 +11569,8 @@
         </p:nvSpPr>
         <p:spPr>
           <a:xfrm>
-            <a:off x="8366760" y="3017520"/>
-            <a:ext cx="3108960" cy="640080"/>
+            <a:off x="8366760" y="3035808"/>
+            <a:ext cx="3108960" cy="685800"/>
           </a:xfrm>
           <a:prstGeom prst="rect">
             <a:avLst/>
@@ -11432,7 +11595,7 @@
               </a:defRPr>
             </a:pPr>
             <a:r>
-              <a:t>Previsão líquida ainda não paga na competência.</a:t>
+              <a:t>Quantidade do dia, local e convênio.</a:t>
             </a:r>
           </a:p>
         </p:txBody>
@@ -11445,8 +11608,8 @@
         </p:nvSpPr>
         <p:spPr>
           <a:xfrm>
-            <a:off x="8366760" y="3886200"/>
-            <a:ext cx="3108960" cy="365760"/>
+            <a:off x="8366760" y="3840480"/>
+            <a:ext cx="3108960" cy="411480"/>
           </a:xfrm>
           <a:prstGeom prst="rect">
             <a:avLst/>
@@ -11471,7 +11634,7 @@
               </a:defRPr>
             </a:pPr>
             <a:r>
-              <a:t>02  Meta e indicadores</a:t>
+              <a:t>Registrar recebimento</a:t>
             </a:r>
           </a:p>
         </p:txBody>
@@ -11484,8 +11647,8 @@
         </p:nvSpPr>
         <p:spPr>
           <a:xfrm>
-            <a:off x="8366760" y="4343400"/>
-            <a:ext cx="3108960" cy="640080"/>
+            <a:off x="8366760" y="4315968"/>
+            <a:ext cx="3108960" cy="685800"/>
           </a:xfrm>
           <a:prstGeom prst="rect">
             <a:avLst/>
@@ -11510,7 +11673,7 @@
               </a:defRPr>
             </a:pPr>
             <a:r>
-              <a:t>Produção, ticket médio e valores recebidos.</a:t>
+              <a:t>Valor recebido e mês da produção.</a:t>
             </a:r>
           </a:p>
         </p:txBody>
@@ -11523,8 +11686,8 @@
         </p:nvSpPr>
         <p:spPr>
           <a:xfrm>
-            <a:off x="8366760" y="5166360"/>
-            <a:ext cx="3108960" cy="365760"/>
+            <a:off x="8366760" y="5120640"/>
+            <a:ext cx="3108960" cy="411480"/>
           </a:xfrm>
           <a:prstGeom prst="rect">
             <a:avLst/>
@@ -11549,7 +11712,7 @@
               </a:defRPr>
             </a:pPr>
             <a:r>
-              <a:t>03  Alertas acionáveis</a:t>
+              <a:t>Acompanhar o saldo</a:t>
             </a:r>
           </a:p>
         </p:txBody>
@@ -11562,8 +11725,8 @@
         </p:nvSpPr>
         <p:spPr>
           <a:xfrm>
-            <a:off x="8366760" y="5577840"/>
-            <a:ext cx="3108960" cy="594360"/>
+            <a:off x="8366760" y="5596127"/>
+            <a:ext cx="3108960" cy="685800"/>
           </a:xfrm>
           <a:prstGeom prst="rect">
             <a:avLst/>
@@ -11588,7 +11751,7 @@
               </a:defRPr>
             </a:pPr>
             <a:r>
-              <a:t>Consultas sem regra e glosas para conferir.</a:t>
+              <a:t>Produção conhecida menos recebimentos, por local.</a:t>
             </a:r>
           </a:p>
         </p:txBody>
@@ -11653,7 +11816,7 @@
               </a:defRPr>
             </a:pPr>
             <a:r>
-              <a:t>LEIA OS NÚMEROS CORRETAMENTE</a:t>
+              <a:t>ENTENDA O RESUMO</a:t>
             </a:r>
           </a:p>
         </p:txBody>
@@ -11692,7 +11855,7 @@
               </a:defRPr>
             </a:pPr>
             <a:r>
-              <a:t>“A receber” é uma previsão.</a:t>
+              <a:t>Produção e recebimento são coisas diferentes.</a:t>
             </a:r>
           </a:p>
         </p:txBody>
@@ -11731,7 +11894,7 @@
               </a:defRPr>
             </a:pPr>
             <a:r>
-              <a:t>O valor ajuda a planejar; a conferência oficial continua com o hospital.</a:t>
+              <a:t>O saldo representa o seu controle pessoal, sem confirmação do hospital.</a:t>
             </a:r>
           </a:p>
         </p:txBody>
@@ -11770,7 +11933,7 @@
               </a:defRPr>
             </a:pPr>
             <a:r>
-              <a:t>REPASSE MED  /  Demonstração com dados fictícios · Out/2026</a:t>
+              <a:t>HonorMed  /  Controle pessoal · dados fictícios · Out/2026</a:t>
             </a:r>
           </a:p>
         </p:txBody>
@@ -11822,7 +11985,7 @@
         </p:nvSpPr>
         <p:spPr>
           <a:xfrm>
-            <a:off x="502920" y="2514600"/>
+            <a:off x="502920" y="2560320"/>
             <a:ext cx="3611880" cy="2743200"/>
           </a:xfrm>
           <a:prstGeom prst="roundRect">
@@ -11869,7 +12032,7 @@
         </p:nvSpPr>
         <p:spPr>
           <a:xfrm>
-            <a:off x="704088" y="2697480"/>
+            <a:off x="704088" y="2743200"/>
             <a:ext cx="3209544" cy="320040"/>
           </a:xfrm>
           <a:prstGeom prst="rect">
@@ -11895,7 +12058,7 @@
               </a:defRPr>
             </a:pPr>
             <a:r>
-              <a:t>PREVISÃO</a:t>
+              <a:t>PRODUÇÃO ESTIMADA</a:t>
             </a:r>
           </a:p>
         </p:txBody>
@@ -11908,7 +12071,7 @@
         </p:nvSpPr>
         <p:spPr>
           <a:xfrm>
-            <a:off x="704088" y="3154680"/>
+            <a:off x="704088" y="3200400"/>
             <a:ext cx="3209544" cy="640080"/>
           </a:xfrm>
           <a:prstGeom prst="rect">
@@ -11934,7 +12097,7 @@
               </a:defRPr>
             </a:pPr>
             <a:r>
-              <a:t>A receber</a:t>
+              <a:t>R$ 2.245,00</a:t>
             </a:r>
           </a:p>
         </p:txBody>
@@ -11947,7 +12110,7 @@
         </p:nvSpPr>
         <p:spPr>
           <a:xfrm>
-            <a:off x="704088" y="3886200"/>
+            <a:off x="704088" y="3931920"/>
             <a:ext cx="3209544" cy="1188720"/>
           </a:xfrm>
           <a:prstGeom prst="rect">
@@ -11973,7 +12136,7 @@
               </a:defRPr>
             </a:pPr>
             <a:r>
-              <a:t>Soma líquida dos atendimentos ainda não pagos. Inclui agendados.</a:t>
+              <a:t>Quantidade registrada × honorários conhecidos. Consultas sem valor ficam fora da soma.</a:t>
             </a:r>
           </a:p>
         </p:txBody>
@@ -11986,7 +12149,7 @@
         </p:nvSpPr>
         <p:spPr>
           <a:xfrm>
-            <a:off x="4279392" y="2514600"/>
+            <a:off x="4279392" y="2560320"/>
             <a:ext cx="3611880" cy="2743200"/>
           </a:xfrm>
           <a:prstGeom prst="roundRect">
@@ -12033,7 +12196,7 @@
         </p:nvSpPr>
         <p:spPr>
           <a:xfrm>
-            <a:off x="4480559" y="2697480"/>
+            <a:off x="4480559" y="2743200"/>
             <a:ext cx="3209544" cy="320040"/>
           </a:xfrm>
           <a:prstGeom prst="rect">
@@ -12059,7 +12222,7 @@
               </a:defRPr>
             </a:pPr>
             <a:r>
-              <a:t>REALIZADO FINANCEIRO</a:t>
+              <a:t>RECEBIDO INFORMADO</a:t>
             </a:r>
           </a:p>
         </p:txBody>
@@ -12072,7 +12235,7 @@
         </p:nvSpPr>
         <p:spPr>
           <a:xfrm>
-            <a:off x="4480559" y="3154680"/>
+            <a:off x="4480559" y="3200400"/>
             <a:ext cx="3209544" cy="640080"/>
           </a:xfrm>
           <a:prstGeom prst="rect">
@@ -12098,7 +12261,7 @@
               </a:defRPr>
             </a:pPr>
             <a:r>
-              <a:t>Já recebido</a:t>
+              <a:t>R$ 500,00</a:t>
             </a:r>
           </a:p>
         </p:txBody>
@@ -12111,7 +12274,7 @@
         </p:nvSpPr>
         <p:spPr>
           <a:xfrm>
-            <a:off x="4480559" y="3886200"/>
+            <a:off x="4480559" y="3931920"/>
             <a:ext cx="3209544" cy="1188720"/>
           </a:xfrm>
           <a:prstGeom prst="rect">
@@ -12137,7 +12300,7 @@
               </a:defRPr>
             </a:pPr>
             <a:r>
-              <a:t>Soma dos atendimentos com status pago. Aparece separada da previsão.</a:t>
+              <a:t>Pagamentos registrados por local, convênio e mês de produção.</a:t>
             </a:r>
           </a:p>
         </p:txBody>
@@ -12150,7 +12313,7 @@
         </p:nvSpPr>
         <p:spPr>
           <a:xfrm>
-            <a:off x="8055864" y="2514600"/>
+            <a:off x="8055864" y="2560320"/>
             <a:ext cx="3611880" cy="2743200"/>
           </a:xfrm>
           <a:prstGeom prst="roundRect">
@@ -12197,7 +12360,7 @@
         </p:nvSpPr>
         <p:spPr>
           <a:xfrm>
-            <a:off x="8257032" y="2697480"/>
+            <a:off x="8257032" y="2743200"/>
             <a:ext cx="3209544" cy="320040"/>
           </a:xfrm>
           <a:prstGeom prst="rect">
@@ -12223,7 +12386,7 @@
               </a:defRPr>
             </a:pPr>
             <a:r>
-              <a:t>MÊS DE REFERÊNCIA</a:t>
+              <a:t>PREVISTO A RECEBER</a:t>
             </a:r>
           </a:p>
         </p:txBody>
@@ -12236,7 +12399,7 @@
         </p:nvSpPr>
         <p:spPr>
           <a:xfrm>
-            <a:off x="8257032" y="3154680"/>
+            <a:off x="8257032" y="3200400"/>
             <a:ext cx="3209544" cy="640080"/>
           </a:xfrm>
           <a:prstGeom prst="rect">
@@ -12262,7 +12425,7 @@
               </a:defRPr>
             </a:pPr>
             <a:r>
-              <a:t>Competência</a:t>
+              <a:t>R$ 1.745,00</a:t>
             </a:r>
           </a:p>
         </p:txBody>
@@ -12275,7 +12438,7 @@
         </p:nvSpPr>
         <p:spPr>
           <a:xfrm>
-            <a:off x="8257032" y="3886200"/>
+            <a:off x="8257032" y="3931920"/>
             <a:ext cx="3209544" cy="1188720"/>
           </a:xfrm>
           <a:prstGeom prst="rect">
@@ -12301,91 +12464,46 @@
               </a:defRPr>
             </a:pPr>
             <a:r>
-              <a:t>Na importação atual, corresponde ao mês do atendimento. O hospital validará o critério definitivo.</a:t>
-            </a:r>
-          </a:p>
-        </p:txBody>
-      </p:sp>
-      <p:sp>
-        <p:nvSpPr>
-          <p:cNvPr id="19" name="Rounded Rectangle 18"/>
-          <p:cNvSpPr/>
-          <p:nvPr/>
-        </p:nvSpPr>
-        <p:spPr>
-          <a:xfrm>
-            <a:off x="502920" y="5532120"/>
-            <a:ext cx="11155680" cy="502920"/>
-          </a:xfrm>
-          <a:prstGeom prst="roundRect">
-            <a:avLst>
-              <a:gd name="adj" fmla="val 12000"/>
-            </a:avLst>
-          </a:prstGeom>
-          <a:solidFill>
-            <a:srgbClr val="D3EBE4"/>
-          </a:solidFill>
-          <a:ln>
-            <a:noFill/>
-          </a:ln>
-        </p:spPr>
-        <p:style>
-          <a:lnRef idx="1">
-            <a:schemeClr val="accent1"/>
-          </a:lnRef>
-          <a:fillRef idx="3">
-            <a:schemeClr val="accent1"/>
-          </a:fillRef>
-          <a:effectRef idx="2">
-            <a:schemeClr val="accent1"/>
-          </a:effectRef>
-          <a:fontRef idx="minor">
-            <a:schemeClr val="lt1"/>
-          </a:fontRef>
-        </p:style>
-        <p:txBody>
-          <a:bodyPr rtlCol="0" anchor="ctr"/>
-          <a:lstStyle/>
-          <a:p>
-            <a:pPr algn="ctr"/>
-          </a:p>
-        </p:txBody>
-      </p:sp>
-      <p:sp>
-        <p:nvSpPr>
-          <p:cNvPr id="20" name="TextBox 19"/>
-          <p:cNvSpPr txBox="1"/>
-          <p:nvPr/>
-        </p:nvSpPr>
-        <p:spPr>
-          <a:xfrm>
-            <a:off x="685800" y="5669280"/>
-            <a:ext cx="10789920" cy="228600"/>
-          </a:xfrm>
-          <a:prstGeom prst="rect">
-            <a:avLst/>
-          </a:prstGeom>
-          <a:noFill/>
-        </p:spPr>
-        <p:txBody>
-          <a:bodyPr wrap="square" lIns="9144" rIns="9144" tIns="0" bIns="0">
-            <a:spAutoFit/>
-          </a:bodyPr>
-          <a:lstStyle/>
-          <a:p>
-            <a:pPr>
-              <a:spcAft>
-                <a:spcPts val="900"/>
-              </a:spcAft>
-              <a:defRPr sz="1300" b="1">
-                <a:solidFill>
-                  <a:srgbClr val="0B7A66"/>
-                </a:solidFill>
-                <a:latin typeface="Manrope"/>
-              </a:defRPr>
-            </a:pPr>
-            <a:r>
-              <a:t>Atendimento agendado pode não acontecer. Uma consulta sem regra fica fora da soma e gera alerta.</a:t>
+              <a:t>Saldo estimado por local e convênio, considerando os valores conhecidos.</a:t>
+            </a:r>
+          </a:p>
+        </p:txBody>
+      </p:sp>
+      <p:sp>
+        <p:nvSpPr>
+          <p:cNvPr id="19" name="TextBox 18"/>
+          <p:cNvSpPr txBox="1"/>
+          <p:nvPr/>
+        </p:nvSpPr>
+        <p:spPr>
+          <a:xfrm>
+            <a:off x="594360" y="5669280"/>
+            <a:ext cx="10881360" cy="548640"/>
+          </a:xfrm>
+          <a:prstGeom prst="rect">
+            <a:avLst/>
+          </a:prstGeom>
+          <a:noFill/>
+        </p:spPr>
+        <p:txBody>
+          <a:bodyPr wrap="square" lIns="9144" rIns="9144" tIns="0" bIns="0">
+            <a:spAutoFit/>
+          </a:bodyPr>
+          <a:lstStyle/>
+          <a:p>
+            <a:pPr>
+              <a:spcAft>
+                <a:spcPts val="900"/>
+              </a:spcAft>
+              <a:defRPr sz="1400" b="0">
+                <a:solidFill>
+                  <a:srgbClr val="52655F"/>
+                </a:solidFill>
+                <a:latin typeface="Manrope"/>
+              </a:defRPr>
+            </a:pPr>
+            <a:r>
+              <a:t>Exemplo fictício de outubro. Há 4 consultas registradas aguardando honorário.</a:t>
             </a:r>
           </a:p>
         </p:txBody>
@@ -12450,7 +12568,7 @@
               </a:defRPr>
             </a:pPr>
             <a:r>
-              <a:t>POR CONVÊNIO E ATENDIMENTO</a:t>
+              <a:t>REGISTRO RÁPIDO</a:t>
             </a:r>
           </a:p>
         </p:txBody>
@@ -12489,7 +12607,7 @@
               </a:defRPr>
             </a:pPr>
             <a:r>
-              <a:t>Entenda de onde vem cada valor.</a:t>
+              <a:t>Não sabe o valor? Registre as consultas assim mesmo.</a:t>
             </a:r>
           </a:p>
         </p:txBody>
@@ -12528,7 +12646,7 @@
               </a:defRPr>
             </a:pPr>
             <a:r>
-              <a:t>A visão consolidada dá contexto. O detalhe permite conferir a composição.</a:t>
+              <a:t>O lançamento pode ser individual ou consolidado ao final do dia.</a:t>
             </a:r>
           </a:p>
         </p:txBody>
@@ -12567,7 +12685,7 @@
               </a:defRPr>
             </a:pPr>
             <a:r>
-              <a:t>REPASSE MED  /  Demonstração com dados fictícios · Out/2026</a:t>
+              <a:t>HonorMed  /  Controle pessoal · dados fictícios · Out/2026</a:t>
             </a:r>
           </a:p>
         </p:txBody>
@@ -12620,7 +12738,7 @@
         <p:spPr>
           <a:xfrm>
             <a:off x="502920" y="2560320"/>
-            <a:ext cx="5468112" cy="2743200"/>
+            <a:ext cx="3611880" cy="2743200"/>
           </a:xfrm>
           <a:prstGeom prst="roundRect">
             <a:avLst>
@@ -12667,7 +12785,7 @@
         <p:spPr>
           <a:xfrm>
             <a:off x="704088" y="2743200"/>
-            <a:ext cx="5065776" cy="320040"/>
+            <a:ext cx="3209544" cy="320040"/>
           </a:xfrm>
           <a:prstGeom prst="rect">
             <a:avLst/>
@@ -12692,7 +12810,7 @@
               </a:defRPr>
             </a:pPr>
             <a:r>
-              <a:t>VISÃO CONSOLIDADA</a:t>
+              <a:t>DATA E LOCAL</a:t>
             </a:r>
           </a:p>
         </p:txBody>
@@ -12706,7 +12824,7 @@
         <p:spPr>
           <a:xfrm>
             <a:off x="704088" y="3200400"/>
-            <a:ext cx="5065776" cy="640080"/>
+            <a:ext cx="3209544" cy="640080"/>
           </a:xfrm>
           <a:prstGeom prst="rect">
             <a:avLst/>
@@ -12731,7 +12849,7 @@
               </a:defRPr>
             </a:pPr>
             <a:r>
-              <a:t>Por convênio</a:t>
+              <a:t>Onde e quando</a:t>
             </a:r>
           </a:p>
         </p:txBody>
@@ -12745,7 +12863,7 @@
         <p:spPr>
           <a:xfrm>
             <a:off x="704088" y="3931920"/>
-            <a:ext cx="5065776" cy="1188720"/>
+            <a:ext cx="3209544" cy="1188720"/>
           </a:xfrm>
           <a:prstGeom prst="rect">
             <a:avLst/>
@@ -12770,7 +12888,7 @@
               </a:defRPr>
             </a:pPr>
             <a:r>
-              <a:t>Quantidade de consultas, valor de referência, honorário, subtotal e ticket médio.</a:t>
+              <a:t>Selecione a data das consultas e o local de atendimento.</a:t>
             </a:r>
           </a:p>
         </p:txBody>
@@ -12783,8 +12901,8 @@
         </p:nvSpPr>
         <p:spPr>
           <a:xfrm>
-            <a:off x="6172200" y="2560320"/>
-            <a:ext cx="5468112" cy="2743200"/>
+            <a:off x="4279392" y="2560320"/>
+            <a:ext cx="3611880" cy="2743200"/>
           </a:xfrm>
           <a:prstGeom prst="roundRect">
             <a:avLst>
@@ -12830,8 +12948,8 @@
         </p:nvSpPr>
         <p:spPr>
           <a:xfrm>
-            <a:off x="6373368" y="2743200"/>
-            <a:ext cx="5065776" cy="320040"/>
+            <a:off x="4480559" y="2743200"/>
+            <a:ext cx="3209544" cy="320040"/>
           </a:xfrm>
           <a:prstGeom prst="rect">
             <a:avLst/>
@@ -12856,7 +12974,7 @@
               </a:defRPr>
             </a:pPr>
             <a:r>
-              <a:t>CONFERÊNCIA PONTUAL</a:t>
+              <a:t>CONVÊNIO E QUANTIDADE</a:t>
             </a:r>
           </a:p>
         </p:txBody>
@@ -12869,8 +12987,8 @@
         </p:nvSpPr>
         <p:spPr>
           <a:xfrm>
-            <a:off x="6373368" y="3200400"/>
-            <a:ext cx="5065776" cy="640080"/>
+            <a:off x="4480559" y="3200400"/>
+            <a:ext cx="3209544" cy="640080"/>
           </a:xfrm>
           <a:prstGeom prst="rect">
             <a:avLst/>
@@ -12895,7 +13013,7 @@
               </a:defRPr>
             </a:pPr>
             <a:r>
-              <a:t>Por atendimento</a:t>
+              <a:t>Quanto você atendeu</a:t>
             </a:r>
           </a:p>
         </p:txBody>
@@ -12908,8 +13026,8 @@
         </p:nvSpPr>
         <p:spPr>
           <a:xfrm>
-            <a:off x="6373368" y="3931920"/>
-            <a:ext cx="5065776" cy="1188720"/>
+            <a:off x="4480559" y="3931920"/>
+            <a:ext cx="3209544" cy="1188720"/>
           </a:xfrm>
           <a:prstGeom prst="rect">
             <a:avLst/>
@@ -12934,38 +13052,163 @@
               </a:defRPr>
             </a:pPr>
             <a:r>
-              <a:t>Código, data, convênio, status, origem do dado e regra utilizada. Filtros por convênio, status e dia.</a:t>
-            </a:r>
-          </a:p>
-        </p:txBody>
-      </p:sp>
-      <p:sp>
-        <p:nvSpPr>
-          <p:cNvPr id="15" name="TextBox 14"/>
-          <p:cNvSpPr txBox="1"/>
-          <p:nvPr/>
-        </p:nvSpPr>
-        <p:spPr>
-          <a:xfrm>
-            <a:off x="594360" y="5650992"/>
-            <a:ext cx="10789920" cy="457200"/>
-          </a:xfrm>
-          <a:prstGeom prst="rect">
-            <a:avLst/>
-          </a:prstGeom>
-          <a:noFill/>
-        </p:spPr>
-        <p:txBody>
-          <a:bodyPr wrap="square" lIns="9144" rIns="9144" tIns="0" bIns="0">
-            <a:spAutoFit/>
-          </a:bodyPr>
-          <a:lstStyle/>
-          <a:p>
-            <a:pPr>
-              <a:spcAft>
-                <a:spcPts val="900"/>
-              </a:spcAft>
-              <a:defRPr sz="1500" b="0">
+              <a:t>Exemplo: 8 consultas Unimed na Clínica Central.</a:t>
+            </a:r>
+          </a:p>
+        </p:txBody>
+      </p:sp>
+      <p:sp>
+        <p:nvSpPr>
+          <p:cNvPr id="15" name="Rounded Rectangle 14"/>
+          <p:cNvSpPr/>
+          <p:nvPr/>
+        </p:nvSpPr>
+        <p:spPr>
+          <a:xfrm>
+            <a:off x="8055864" y="2560320"/>
+            <a:ext cx="3611880" cy="2743200"/>
+          </a:xfrm>
+          <a:prstGeom prst="roundRect">
+            <a:avLst>
+              <a:gd name="adj" fmla="val 12000"/>
+            </a:avLst>
+          </a:prstGeom>
+          <a:solidFill>
+            <a:srgbClr val="FFFFFF"/>
+          </a:solidFill>
+          <a:ln>
+            <a:solidFill>
+              <a:srgbClr val="D5E0DC"/>
+            </a:solidFill>
+          </a:ln>
+        </p:spPr>
+        <p:style>
+          <a:lnRef idx="1">
+            <a:schemeClr val="accent1"/>
+          </a:lnRef>
+          <a:fillRef idx="3">
+            <a:schemeClr val="accent1"/>
+          </a:fillRef>
+          <a:effectRef idx="2">
+            <a:schemeClr val="accent1"/>
+          </a:effectRef>
+          <a:fontRef idx="minor">
+            <a:schemeClr val="lt1"/>
+          </a:fontRef>
+        </p:style>
+        <p:txBody>
+          <a:bodyPr rtlCol="0" anchor="ctr"/>
+          <a:lstStyle/>
+          <a:p>
+            <a:pPr algn="ctr"/>
+          </a:p>
+        </p:txBody>
+      </p:sp>
+      <p:sp>
+        <p:nvSpPr>
+          <p:cNvPr id="16" name="TextBox 15"/>
+          <p:cNvSpPr txBox="1"/>
+          <p:nvPr/>
+        </p:nvSpPr>
+        <p:spPr>
+          <a:xfrm>
+            <a:off x="8257032" y="2743200"/>
+            <a:ext cx="3209544" cy="320040"/>
+          </a:xfrm>
+          <a:prstGeom prst="rect">
+            <a:avLst/>
+          </a:prstGeom>
+          <a:noFill/>
+        </p:spPr>
+        <p:txBody>
+          <a:bodyPr wrap="square" lIns="9144" rIns="9144" tIns="0" bIns="0">
+            <a:spAutoFit/>
+          </a:bodyPr>
+          <a:lstStyle/>
+          <a:p>
+            <a:pPr>
+              <a:spcAft>
+                <a:spcPts val="900"/>
+              </a:spcAft>
+              <a:defRPr sz="1100" b="1">
+                <a:solidFill>
+                  <a:srgbClr val="0B7A66"/>
+                </a:solidFill>
+                <a:latin typeface="Manrope"/>
+              </a:defRPr>
+            </a:pPr>
+            <a:r>
+              <a:t>HONORÁRIO OPCIONAL</a:t>
+            </a:r>
+          </a:p>
+        </p:txBody>
+      </p:sp>
+      <p:sp>
+        <p:nvSpPr>
+          <p:cNvPr id="17" name="TextBox 16"/>
+          <p:cNvSpPr txBox="1"/>
+          <p:nvPr/>
+        </p:nvSpPr>
+        <p:spPr>
+          <a:xfrm>
+            <a:off x="8257032" y="3200400"/>
+            <a:ext cx="3209544" cy="640080"/>
+          </a:xfrm>
+          <a:prstGeom prst="rect">
+            <a:avLst/>
+          </a:prstGeom>
+          <a:noFill/>
+        </p:spPr>
+        <p:txBody>
+          <a:bodyPr wrap="square" lIns="9144" rIns="9144" tIns="0" bIns="0">
+            <a:spAutoFit/>
+          </a:bodyPr>
+          <a:lstStyle/>
+          <a:p>
+            <a:pPr>
+              <a:spcAft>
+                <a:spcPts val="900"/>
+              </a:spcAft>
+              <a:defRPr sz="2300" b="1">
+                <a:solidFill>
+                  <a:srgbClr val="0E1F1B"/>
+                </a:solidFill>
+                <a:latin typeface="Bricolage Grotesque"/>
+              </a:defRPr>
+            </a:pPr>
+            <a:r>
+              <a:t>Valor pode esperar</a:t>
+            </a:r>
+          </a:p>
+        </p:txBody>
+      </p:sp>
+      <p:sp>
+        <p:nvSpPr>
+          <p:cNvPr id="18" name="TextBox 17"/>
+          <p:cNvSpPr txBox="1"/>
+          <p:nvPr/>
+        </p:nvSpPr>
+        <p:spPr>
+          <a:xfrm>
+            <a:off x="8257032" y="3931920"/>
+            <a:ext cx="3209544" cy="1188720"/>
+          </a:xfrm>
+          <a:prstGeom prst="rect">
+            <a:avLst/>
+          </a:prstGeom>
+          <a:noFill/>
+        </p:spPr>
+        <p:txBody>
+          <a:bodyPr wrap="square" lIns="9144" rIns="9144" tIns="0" bIns="0">
+            <a:spAutoFit/>
+          </a:bodyPr>
+          <a:lstStyle/>
+          <a:p>
+            <a:pPr>
+              <a:spcAft>
+                <a:spcPts val="900"/>
+              </a:spcAft>
+              <a:defRPr sz="1600" b="0">
                 <a:solidFill>
                   <a:srgbClr val="52655F"/>
                 </a:solidFill>
@@ -12973,7 +13216,46 @@
               </a:defRPr>
             </a:pPr>
             <a:r>
-              <a:t>Se houver dedução, glosa ou mudança de regra, o subtotal considera cada atendimento individualmente.</a:t>
+              <a:t>Sem honorário cadastrado, a quantidade fica salva e o valor fica pendente.</a:t>
+            </a:r>
+          </a:p>
+        </p:txBody>
+      </p:sp>
+      <p:sp>
+        <p:nvSpPr>
+          <p:cNvPr id="19" name="TextBox 18"/>
+          <p:cNvSpPr txBox="1"/>
+          <p:nvPr/>
+        </p:nvSpPr>
+        <p:spPr>
+          <a:xfrm>
+            <a:off x="594360" y="5669280"/>
+            <a:ext cx="10881360" cy="548640"/>
+          </a:xfrm>
+          <a:prstGeom prst="rect">
+            <a:avLst/>
+          </a:prstGeom>
+          <a:noFill/>
+        </p:spPr>
+        <p:txBody>
+          <a:bodyPr wrap="square" lIns="9144" rIns="9144" tIns="0" bIns="0">
+            <a:spAutoFit/>
+          </a:bodyPr>
+          <a:lstStyle/>
+          <a:p>
+            <a:pPr>
+              <a:spcAft>
+                <a:spcPts val="900"/>
+              </a:spcAft>
+              <a:defRPr sz="1400" b="0">
+                <a:solidFill>
+                  <a:srgbClr val="52655F"/>
+                </a:solidFill>
+                <a:latin typeface="Manrope"/>
+              </a:defRPr>
+            </a:pPr>
+            <a:r>
+              <a:t>Sem nome, CPF ou identificação de pacientes. Você pode editar ou excluir lançamentos para corrigir.</a:t>
             </a:r>
           </a:p>
         </p:txBody>
@@ -13077,7 +13359,7 @@
               </a:defRPr>
             </a:pPr>
             <a:r>
-              <a:t>Como o repasse é calculado.</a:t>
+              <a:t>Da produção ao saldo, com clareza.</a:t>
             </a:r>
           </a:p>
         </p:txBody>
@@ -13116,7 +13398,7 @@
               </a:defRPr>
             </a:pPr>
             <a:r>
-              <a:t>Dois modelos de regra: valor fixo em reais ou percentual sobre o valor da consulta.</a:t>
+              <a:t>O cálculo do seu controle pessoal usa o honorário esperado por consulta.</a:t>
             </a:r>
           </a:p>
         </p:txBody>
@@ -13155,7 +13437,7 @@
               </a:defRPr>
             </a:pPr>
             <a:r>
-              <a:t>REPASSE MED  /  Demonstração com dados fictícios · Out/2026</a:t>
+              <a:t>HonorMed  /  Controle pessoal · dados fictícios · Out/2026</a:t>
             </a:r>
           </a:p>
         </p:txBody>
@@ -13270,7 +13552,7 @@
               <a:spcAft>
                 <a:spcPts val="900"/>
               </a:spcAft>
-              <a:defRPr sz="1700" b="1">
+              <a:defRPr sz="1800" b="1">
                 <a:solidFill>
                   <a:srgbClr val="FFFFFF"/>
                 </a:solidFill>
@@ -13278,7 +13560,7 @@
               </a:defRPr>
             </a:pPr>
             <a:r>
-              <a:t>CONSULTA DE R$ 200,00  ×  HONORÁRIO DE 60%</a:t>
+              <a:t>8 CONSULTAS × R$ 85,00 DE HONORÁRIO</a:t>
             </a:r>
           </a:p>
         </p:txBody>
@@ -13291,7 +13573,7 @@
         </p:nvSpPr>
         <p:spPr>
           <a:xfrm>
-            <a:off x="777240" y="3429000"/>
+            <a:off x="777240" y="3474720"/>
             <a:ext cx="5486400" cy="914400"/>
           </a:xfrm>
           <a:prstGeom prst="rect">
@@ -13317,7 +13599,7 @@
               </a:defRPr>
             </a:pPr>
             <a:r>
-              <a:t>R$ 120,00</a:t>
+              <a:t>R$ 680,00</a:t>
             </a:r>
           </a:p>
         </p:txBody>
@@ -13356,7 +13638,7 @@
               </a:defRPr>
             </a:pPr>
             <a:r>
-              <a:t>− dedução de 10%  →  R$ 108,00</a:t>
+              <a:t>Recebimento informado: R$ 200,00</a:t>
             </a:r>
           </a:p>
           <a:p>
@@ -13372,7 +13654,7 @@
               </a:defRPr>
             </a:pPr>
             <a:r>
-              <a:t>− glosa parcial de 50%  →  R$ 54,00 líquidos</a:t>
+              <a:t>Saldo previsto: R$ 480,00</a:t>
             </a:r>
           </a:p>
         </p:txBody>
@@ -13386,24 +13668,24 @@
         <p:spPr>
           <a:xfrm>
             <a:off x="7909560" y="2697480"/>
-            <a:ext cx="3383280" cy="457200"/>
-          </a:xfrm>
-          <a:prstGeom prst="rect">
-            <a:avLst/>
-          </a:prstGeom>
-          <a:noFill/>
-        </p:spPr>
-        <p:txBody>
-          <a:bodyPr wrap="square" lIns="9144" rIns="9144" tIns="0" bIns="0">
-            <a:spAutoFit/>
-          </a:bodyPr>
-          <a:lstStyle/>
-          <a:p>
-            <a:pPr>
-              <a:spcAft>
-                <a:spcPts val="900"/>
-              </a:spcAft>
-              <a:defRPr sz="2300" b="1">
+            <a:ext cx="3383280" cy="731520"/>
+          </a:xfrm>
+          <a:prstGeom prst="rect">
+            <a:avLst/>
+          </a:prstGeom>
+          <a:noFill/>
+        </p:spPr>
+        <p:txBody>
+          <a:bodyPr wrap="square" lIns="9144" rIns="9144" tIns="0" bIns="0">
+            <a:spAutoFit/>
+          </a:bodyPr>
+          <a:lstStyle/>
+          <a:p>
+            <a:pPr>
+              <a:spcAft>
+                <a:spcPts val="900"/>
+              </a:spcAft>
+              <a:defRPr sz="2200" b="1">
                 <a:solidFill>
                   <a:srgbClr val="0B7A66"/>
                 </a:solidFill>
@@ -13411,7 +13693,7 @@
               </a:defRPr>
             </a:pPr>
             <a:r>
-              <a:t>Regra fixa</a:t>
+              <a:t>Honorário líquido esperado</a:t>
             </a:r>
           </a:p>
         </p:txBody>
@@ -13424,8 +13706,8 @@
         </p:nvSpPr>
         <p:spPr>
           <a:xfrm>
-            <a:off x="7909560" y="3246120"/>
-            <a:ext cx="3383280" cy="822960"/>
+            <a:off x="7909560" y="3611880"/>
+            <a:ext cx="3383280" cy="1005840"/>
           </a:xfrm>
           <a:prstGeom prst="rect">
             <a:avLst/>
@@ -13450,7 +13732,7 @@
               </a:defRPr>
             </a:pPr>
             <a:r>
-              <a:t>Substitui o percentual por um honorário em reais.</a:t>
+              <a:t>Informe o valor por consulta já considerando os descontos que conhece.</a:t>
             </a:r>
           </a:p>
         </p:txBody>
@@ -13463,25 +13745,25 @@
         </p:nvSpPr>
         <p:spPr>
           <a:xfrm>
-            <a:off x="7909560" y="4343400"/>
-            <a:ext cx="3383280" cy="457200"/>
-          </a:xfrm>
-          <a:prstGeom prst="rect">
-            <a:avLst/>
-          </a:prstGeom>
-          <a:noFill/>
-        </p:spPr>
-        <p:txBody>
-          <a:bodyPr wrap="square" lIns="9144" rIns="9144" tIns="0" bIns="0">
-            <a:spAutoFit/>
-          </a:bodyPr>
-          <a:lstStyle/>
-          <a:p>
-            <a:pPr>
-              <a:spcAft>
-                <a:spcPts val="900"/>
-              </a:spcAft>
-              <a:defRPr sz="2300" b="1">
+            <a:off x="7909560" y="4800600"/>
+            <a:ext cx="3383280" cy="548640"/>
+          </a:xfrm>
+          <a:prstGeom prst="rect">
+            <a:avLst/>
+          </a:prstGeom>
+          <a:noFill/>
+        </p:spPr>
+        <p:txBody>
+          <a:bodyPr wrap="square" lIns="9144" rIns="9144" tIns="0" bIns="0">
+            <a:spAutoFit/>
+          </a:bodyPr>
+          <a:lstStyle/>
+          <a:p>
+            <a:pPr>
+              <a:spcAft>
+                <a:spcPts val="900"/>
+              </a:spcAft>
+              <a:defRPr sz="2200" b="1">
                 <a:solidFill>
                   <a:srgbClr val="0B7A66"/>
                 </a:solidFill>
@@ -13489,7 +13771,7 @@
               </a:defRPr>
             </a:pPr>
             <a:r>
-              <a:t>Vigência</a:t>
+              <a:t>Valores preservados</a:t>
             </a:r>
           </a:p>
         </p:txBody>
@@ -13502,25 +13784,25 @@
         </p:nvSpPr>
         <p:spPr>
           <a:xfrm>
-            <a:off x="7909560" y="4892040"/>
-            <a:ext cx="3383280" cy="822960"/>
-          </a:xfrm>
-          <a:prstGeom prst="rect">
-            <a:avLst/>
-          </a:prstGeom>
-          <a:noFill/>
-        </p:spPr>
-        <p:txBody>
-          <a:bodyPr wrap="square" lIns="9144" rIns="9144" tIns="0" bIns="0">
-            <a:spAutoFit/>
-          </a:bodyPr>
-          <a:lstStyle/>
-          <a:p>
-            <a:pPr>
-              <a:spcAft>
-                <a:spcPts val="900"/>
-              </a:spcAft>
-              <a:defRPr sz="1700" b="0">
+            <a:off x="7909560" y="5440680"/>
+            <a:ext cx="3383280" cy="731520"/>
+          </a:xfrm>
+          <a:prstGeom prst="rect">
+            <a:avLst/>
+          </a:prstGeom>
+          <a:noFill/>
+        </p:spPr>
+        <p:txBody>
+          <a:bodyPr wrap="square" lIns="9144" rIns="9144" tIns="0" bIns="0">
+            <a:spAutoFit/>
+          </a:bodyPr>
+          <a:lstStyle/>
+          <a:p>
+            <a:pPr>
+              <a:spcAft>
+                <a:spcPts val="900"/>
+              </a:spcAft>
+              <a:defRPr sz="1600" b="0">
                 <a:solidFill>
                   <a:srgbClr val="52655F"/>
                 </a:solidFill>
@@ -13528,7 +13810,7 @@
               </a:defRPr>
             </a:pPr>
             <a:r>
-              <a:t>A regra deve estar válida na data do atendimento.</a:t>
+              <a:t>Registros com honorário mantêm o valor usado no lançamento.</a:t>
             </a:r>
           </a:p>
         </p:txBody>
@@ -13593,7 +13875,7 @@
               </a:defRPr>
             </a:pPr>
             <a:r>
-              <a:t>CICLO DE RECEBIMENTO</a:t>
+              <a:t>RECEBIMENTOS</a:t>
             </a:r>
           </a:p>
         </p:txBody>
@@ -13632,7 +13914,7 @@
               </a:defRPr>
             </a:pPr>
             <a:r>
-              <a:t>Status ajudam a orientar a conferência.</a:t>
+              <a:t>O mês da produção pode ser diferente do pagamento.</a:t>
             </a:r>
           </a:p>
         </p:txBody>
@@ -13671,7 +13953,7 @@
               </a:defRPr>
             </a:pPr>
             <a:r>
-              <a:t>O gráfico mostra quantidades por etapa; a legenda também informa valores líquidos.</a:t>
+              <a:t>Você informa a que período o dinheiro recebido se refere.</a:t>
             </a:r>
           </a:p>
         </p:txBody>
@@ -13710,7 +13992,7 @@
               </a:defRPr>
             </a:pPr>
             <a:r>
-              <a:t>REPASSE MED  /  Demonstração com dados fictícios · Out/2026</a:t>
+              <a:t>HonorMed  /  Controle pessoal · dados fictícios · Out/2026</a:t>
             </a:r>
           </a:p>
         </p:txBody>
@@ -13762,8 +14044,8 @@
         </p:nvSpPr>
         <p:spPr>
           <a:xfrm>
-            <a:off x="502920" y="2468880"/>
-            <a:ext cx="3611880" cy="1463040"/>
+            <a:off x="502920" y="2560320"/>
+            <a:ext cx="3611880" cy="2743200"/>
           </a:xfrm>
           <a:prstGeom prst="roundRect">
             <a:avLst>
@@ -13803,23 +14085,144 @@
       </p:sp>
       <p:sp>
         <p:nvSpPr>
-          <p:cNvPr id="8" name="Rectangle 7"/>
+          <p:cNvPr id="8" name="TextBox 7"/>
+          <p:cNvSpPr txBox="1"/>
+          <p:nvPr/>
+        </p:nvSpPr>
+        <p:spPr>
+          <a:xfrm>
+            <a:off x="704088" y="2743200"/>
+            <a:ext cx="3209544" cy="320040"/>
+          </a:xfrm>
+          <a:prstGeom prst="rect">
+            <a:avLst/>
+          </a:prstGeom>
+          <a:noFill/>
+        </p:spPr>
+        <p:txBody>
+          <a:bodyPr wrap="square" lIns="9144" rIns="9144" tIns="0" bIns="0">
+            <a:spAutoFit/>
+          </a:bodyPr>
+          <a:lstStyle/>
+          <a:p>
+            <a:pPr>
+              <a:spcAft>
+                <a:spcPts val="900"/>
+              </a:spcAft>
+              <a:defRPr sz="1100" b="1">
+                <a:solidFill>
+                  <a:srgbClr val="0B7A66"/>
+                </a:solidFill>
+                <a:latin typeface="Manrope"/>
+              </a:defRPr>
+            </a:pPr>
+            <a:r>
+              <a:t>PERÍODO DE REFERÊNCIA</a:t>
+            </a:r>
+          </a:p>
+        </p:txBody>
+      </p:sp>
+      <p:sp>
+        <p:nvSpPr>
+          <p:cNvPr id="9" name="TextBox 8"/>
+          <p:cNvSpPr txBox="1"/>
+          <p:nvPr/>
+        </p:nvSpPr>
+        <p:spPr>
+          <a:xfrm>
+            <a:off x="704088" y="3200400"/>
+            <a:ext cx="3209544" cy="640080"/>
+          </a:xfrm>
+          <a:prstGeom prst="rect">
+            <a:avLst/>
+          </a:prstGeom>
+          <a:noFill/>
+        </p:spPr>
+        <p:txBody>
+          <a:bodyPr wrap="square" lIns="9144" rIns="9144" tIns="0" bIns="0">
+            <a:spAutoFit/>
+          </a:bodyPr>
+          <a:lstStyle/>
+          <a:p>
+            <a:pPr>
+              <a:spcAft>
+                <a:spcPts val="900"/>
+              </a:spcAft>
+              <a:defRPr sz="2300" b="1">
+                <a:solidFill>
+                  <a:srgbClr val="0E1F1B"/>
+                </a:solidFill>
+                <a:latin typeface="Bricolage Grotesque"/>
+              </a:defRPr>
+            </a:pPr>
+            <a:r>
+              <a:t>Produção de outubro</a:t>
+            </a:r>
+          </a:p>
+        </p:txBody>
+      </p:sp>
+      <p:sp>
+        <p:nvSpPr>
+          <p:cNvPr id="10" name="TextBox 9"/>
+          <p:cNvSpPr txBox="1"/>
+          <p:nvPr/>
+        </p:nvSpPr>
+        <p:spPr>
+          <a:xfrm>
+            <a:off x="704088" y="3931920"/>
+            <a:ext cx="3209544" cy="1188720"/>
+          </a:xfrm>
+          <a:prstGeom prst="rect">
+            <a:avLst/>
+          </a:prstGeom>
+          <a:noFill/>
+        </p:spPr>
+        <p:txBody>
+          <a:bodyPr wrap="square" lIns="9144" rIns="9144" tIns="0" bIns="0">
+            <a:spAutoFit/>
+          </a:bodyPr>
+          <a:lstStyle/>
+          <a:p>
+            <a:pPr>
+              <a:spcAft>
+                <a:spcPts val="900"/>
+              </a:spcAft>
+              <a:defRPr sz="1600" b="0">
+                <a:solidFill>
+                  <a:srgbClr val="52655F"/>
+                </a:solidFill>
+                <a:latin typeface="Manrope"/>
+              </a:defRPr>
+            </a:pPr>
+            <a:r>
+              <a:t>Escolha o mês das consultas às quais o pagamento se refere.</a:t>
+            </a:r>
+          </a:p>
+        </p:txBody>
+      </p:sp>
+      <p:sp>
+        <p:nvSpPr>
+          <p:cNvPr id="11" name="Rounded Rectangle 10"/>
           <p:cNvSpPr/>
           <p:nvPr/>
         </p:nvSpPr>
         <p:spPr>
           <a:xfrm>
-            <a:off x="658368" y="2651760"/>
-            <a:ext cx="91440" cy="365760"/>
-          </a:xfrm>
-          <a:prstGeom prst="rect">
-            <a:avLst/>
+            <a:off x="4279392" y="2560320"/>
+            <a:ext cx="3611880" cy="2743200"/>
+          </a:xfrm>
+          <a:prstGeom prst="roundRect">
+            <a:avLst>
+              <a:gd name="adj" fmla="val 12000"/>
+            </a:avLst>
           </a:prstGeom>
           <a:solidFill>
-            <a:srgbClr val="9AABA6"/>
+            <a:srgbClr val="FFFFFF"/>
           </a:solidFill>
           <a:ln>
-            <a:noFill/>
+            <a:solidFill>
+              <a:srgbClr val="D5E0DC"/>
+            </a:solidFill>
           </a:ln>
         </p:spPr>
         <p:style>
@@ -13846,70 +14249,109 @@
       </p:sp>
       <p:sp>
         <p:nvSpPr>
-          <p:cNvPr id="9" name="TextBox 8"/>
-          <p:cNvSpPr txBox="1"/>
-          <p:nvPr/>
-        </p:nvSpPr>
-        <p:spPr>
-          <a:xfrm>
-            <a:off x="896112" y="2651760"/>
-            <a:ext cx="2971800" cy="411480"/>
-          </a:xfrm>
-          <a:prstGeom prst="rect">
-            <a:avLst/>
-          </a:prstGeom>
-          <a:noFill/>
-        </p:spPr>
-        <p:txBody>
-          <a:bodyPr wrap="square" lIns="9144" rIns="9144" tIns="0" bIns="0">
-            <a:spAutoFit/>
-          </a:bodyPr>
-          <a:lstStyle/>
-          <a:p>
-            <a:pPr>
-              <a:spcAft>
-                <a:spcPts val="900"/>
-              </a:spcAft>
-              <a:defRPr sz="2100" b="1">
+          <p:cNvPr id="12" name="TextBox 11"/>
+          <p:cNvSpPr txBox="1"/>
+          <p:nvPr/>
+        </p:nvSpPr>
+        <p:spPr>
+          <a:xfrm>
+            <a:off x="4480559" y="2743200"/>
+            <a:ext cx="3209544" cy="320040"/>
+          </a:xfrm>
+          <a:prstGeom prst="rect">
+            <a:avLst/>
+          </a:prstGeom>
+          <a:noFill/>
+        </p:spPr>
+        <p:txBody>
+          <a:bodyPr wrap="square" lIns="9144" rIns="9144" tIns="0" bIns="0">
+            <a:spAutoFit/>
+          </a:bodyPr>
+          <a:lstStyle/>
+          <a:p>
+            <a:pPr>
+              <a:spcAft>
+                <a:spcPts val="900"/>
+              </a:spcAft>
+              <a:defRPr sz="1100" b="1">
+                <a:solidFill>
+                  <a:srgbClr val="0B7A66"/>
+                </a:solidFill>
+                <a:latin typeface="Manrope"/>
+              </a:defRPr>
+            </a:pPr>
+            <a:r>
+              <a:t>ENTRADA DO DINHEIRO</a:t>
+            </a:r>
+          </a:p>
+        </p:txBody>
+      </p:sp>
+      <p:sp>
+        <p:nvSpPr>
+          <p:cNvPr id="13" name="TextBox 12"/>
+          <p:cNvSpPr txBox="1"/>
+          <p:nvPr/>
+        </p:nvSpPr>
+        <p:spPr>
+          <a:xfrm>
+            <a:off x="4480559" y="3200400"/>
+            <a:ext cx="3209544" cy="640080"/>
+          </a:xfrm>
+          <a:prstGeom prst="rect">
+            <a:avLst/>
+          </a:prstGeom>
+          <a:noFill/>
+        </p:spPr>
+        <p:txBody>
+          <a:bodyPr wrap="square" lIns="9144" rIns="9144" tIns="0" bIns="0">
+            <a:spAutoFit/>
+          </a:bodyPr>
+          <a:lstStyle/>
+          <a:p>
+            <a:pPr>
+              <a:spcAft>
+                <a:spcPts val="900"/>
+              </a:spcAft>
+              <a:defRPr sz="2300" b="1">
                 <a:solidFill>
                   <a:srgbClr val="0E1F1B"/>
                 </a:solidFill>
-                <a:latin typeface="Manrope"/>
-              </a:defRPr>
-            </a:pPr>
-            <a:r>
-              <a:t>Agendado</a:t>
-            </a:r>
-          </a:p>
-        </p:txBody>
-      </p:sp>
-      <p:sp>
-        <p:nvSpPr>
-          <p:cNvPr id="10" name="TextBox 9"/>
-          <p:cNvSpPr txBox="1"/>
-          <p:nvPr/>
-        </p:nvSpPr>
-        <p:spPr>
-          <a:xfrm>
-            <a:off x="685800" y="3246120"/>
-            <a:ext cx="3246120" cy="548640"/>
-          </a:xfrm>
-          <a:prstGeom prst="rect">
-            <a:avLst/>
-          </a:prstGeom>
-          <a:noFill/>
-        </p:spPr>
-        <p:txBody>
-          <a:bodyPr wrap="square" lIns="9144" rIns="9144" tIns="0" bIns="0">
-            <a:spAutoFit/>
-          </a:bodyPr>
-          <a:lstStyle/>
-          <a:p>
-            <a:pPr>
-              <a:spcAft>
-                <a:spcPts val="900"/>
-              </a:spcAft>
-              <a:defRPr sz="1400" b="0">
+                <a:latin typeface="Bricolage Grotesque"/>
+              </a:defRPr>
+            </a:pPr>
+            <a:r>
+              <a:t>Recebido em novembro</a:t>
+            </a:r>
+          </a:p>
+        </p:txBody>
+      </p:sp>
+      <p:sp>
+        <p:nvSpPr>
+          <p:cNvPr id="14" name="TextBox 13"/>
+          <p:cNvSpPr txBox="1"/>
+          <p:nvPr/>
+        </p:nvSpPr>
+        <p:spPr>
+          <a:xfrm>
+            <a:off x="4480559" y="3931920"/>
+            <a:ext cx="3209544" cy="1188720"/>
+          </a:xfrm>
+          <a:prstGeom prst="rect">
+            <a:avLst/>
+          </a:prstGeom>
+          <a:noFill/>
+        </p:spPr>
+        <p:txBody>
+          <a:bodyPr wrap="square" lIns="9144" rIns="9144" tIns="0" bIns="0">
+            <a:spAutoFit/>
+          </a:bodyPr>
+          <a:lstStyle/>
+          <a:p>
+            <a:pPr>
+              <a:spcAft>
+                <a:spcPts val="900"/>
+              </a:spcAft>
+              <a:defRPr sz="1600" b="0">
                 <a:solidFill>
                   <a:srgbClr val="52655F"/>
                 </a:solidFill>
@@ -13917,21 +14359,21 @@
               </a:defRPr>
             </a:pPr>
             <a:r>
-              <a:t>Consulta prevista. Ainda pode mudar.</a:t>
-            </a:r>
-          </a:p>
-        </p:txBody>
-      </p:sp>
-      <p:sp>
-        <p:nvSpPr>
-          <p:cNvPr id="11" name="Rounded Rectangle 10"/>
+              <a:t>Informe convênio, local, data real e valor, mesmo que parcial.</a:t>
+            </a:r>
+          </a:p>
+        </p:txBody>
+      </p:sp>
+      <p:sp>
+        <p:nvSpPr>
+          <p:cNvPr id="15" name="Rounded Rectangle 14"/>
           <p:cNvSpPr/>
           <p:nvPr/>
         </p:nvSpPr>
         <p:spPr>
           <a:xfrm>
-            <a:off x="4297680" y="2468880"/>
-            <a:ext cx="3611880" cy="1463040"/>
+            <a:off x="8055864" y="2560320"/>
+            <a:ext cx="3611880" cy="2743200"/>
           </a:xfrm>
           <a:prstGeom prst="roundRect">
             <a:avLst>
@@ -13971,96 +14413,131 @@
       </p:sp>
       <p:sp>
         <p:nvSpPr>
-          <p:cNvPr id="12" name="Rectangle 11"/>
-          <p:cNvSpPr/>
-          <p:nvPr/>
-        </p:nvSpPr>
-        <p:spPr>
-          <a:xfrm>
-            <a:off x="4453128" y="2651760"/>
-            <a:ext cx="91440" cy="365760"/>
-          </a:xfrm>
-          <a:prstGeom prst="rect">
-            <a:avLst/>
-          </a:prstGeom>
-          <a:solidFill>
-            <a:srgbClr val="7863A3"/>
-          </a:solidFill>
-          <a:ln>
-            <a:noFill/>
-          </a:ln>
-        </p:spPr>
-        <p:style>
-          <a:lnRef idx="1">
-            <a:schemeClr val="accent1"/>
-          </a:lnRef>
-          <a:fillRef idx="3">
-            <a:schemeClr val="accent1"/>
-          </a:fillRef>
-          <a:effectRef idx="2">
-            <a:schemeClr val="accent1"/>
-          </a:effectRef>
-          <a:fontRef idx="minor">
-            <a:schemeClr val="lt1"/>
-          </a:fontRef>
-        </p:style>
-        <p:txBody>
-          <a:bodyPr rtlCol="0" anchor="ctr"/>
-          <a:lstStyle/>
-          <a:p>
-            <a:pPr algn="ctr"/>
-          </a:p>
-        </p:txBody>
-      </p:sp>
-      <p:sp>
-        <p:nvSpPr>
-          <p:cNvPr id="13" name="TextBox 12"/>
-          <p:cNvSpPr txBox="1"/>
-          <p:nvPr/>
-        </p:nvSpPr>
-        <p:spPr>
-          <a:xfrm>
-            <a:off x="4690872" y="2651760"/>
-            <a:ext cx="2971800" cy="411480"/>
-          </a:xfrm>
-          <a:prstGeom prst="rect">
-            <a:avLst/>
-          </a:prstGeom>
-          <a:noFill/>
-        </p:spPr>
-        <p:txBody>
-          <a:bodyPr wrap="square" lIns="9144" rIns="9144" tIns="0" bIns="0">
-            <a:spAutoFit/>
-          </a:bodyPr>
-          <a:lstStyle/>
-          <a:p>
-            <a:pPr>
-              <a:spcAft>
-                <a:spcPts val="900"/>
-              </a:spcAft>
-              <a:defRPr sz="2100" b="1">
+          <p:cNvPr id="16" name="TextBox 15"/>
+          <p:cNvSpPr txBox="1"/>
+          <p:nvPr/>
+        </p:nvSpPr>
+        <p:spPr>
+          <a:xfrm>
+            <a:off x="8257032" y="2743200"/>
+            <a:ext cx="3209544" cy="320040"/>
+          </a:xfrm>
+          <a:prstGeom prst="rect">
+            <a:avLst/>
+          </a:prstGeom>
+          <a:noFill/>
+        </p:spPr>
+        <p:txBody>
+          <a:bodyPr wrap="square" lIns="9144" rIns="9144" tIns="0" bIns="0">
+            <a:spAutoFit/>
+          </a:bodyPr>
+          <a:lstStyle/>
+          <a:p>
+            <a:pPr>
+              <a:spcAft>
+                <a:spcPts val="900"/>
+              </a:spcAft>
+              <a:defRPr sz="1100" b="1">
+                <a:solidFill>
+                  <a:srgbClr val="0B7A66"/>
+                </a:solidFill>
+                <a:latin typeface="Manrope"/>
+              </a:defRPr>
+            </a:pPr>
+            <a:r>
+              <a:t>ACOMPANHAMENTO</a:t>
+            </a:r>
+          </a:p>
+        </p:txBody>
+      </p:sp>
+      <p:sp>
+        <p:nvSpPr>
+          <p:cNvPr id="17" name="TextBox 16"/>
+          <p:cNvSpPr txBox="1"/>
+          <p:nvPr/>
+        </p:nvSpPr>
+        <p:spPr>
+          <a:xfrm>
+            <a:off x="8257032" y="3200400"/>
+            <a:ext cx="3209544" cy="640080"/>
+          </a:xfrm>
+          <a:prstGeom prst="rect">
+            <a:avLst/>
+          </a:prstGeom>
+          <a:noFill/>
+        </p:spPr>
+        <p:txBody>
+          <a:bodyPr wrap="square" lIns="9144" rIns="9144" tIns="0" bIns="0">
+            <a:spAutoFit/>
+          </a:bodyPr>
+          <a:lstStyle/>
+          <a:p>
+            <a:pPr>
+              <a:spcAft>
+                <a:spcPts val="900"/>
+              </a:spcAft>
+              <a:defRPr sz="2300" b="1">
                 <a:solidFill>
                   <a:srgbClr val="0E1F1B"/>
                 </a:solidFill>
-                <a:latin typeface="Manrope"/>
-              </a:defRPr>
-            </a:pPr>
-            <a:r>
-              <a:t>Realizado</a:t>
-            </a:r>
-          </a:p>
-        </p:txBody>
-      </p:sp>
-      <p:sp>
-        <p:nvSpPr>
-          <p:cNvPr id="14" name="TextBox 13"/>
-          <p:cNvSpPr txBox="1"/>
-          <p:nvPr/>
-        </p:nvSpPr>
-        <p:spPr>
-          <a:xfrm>
-            <a:off x="4480560" y="3246120"/>
-            <a:ext cx="3246120" cy="548640"/>
+                <a:latin typeface="Bricolage Grotesque"/>
+              </a:defRPr>
+            </a:pPr>
+            <a:r>
+              <a:t>Saldo de outubro</a:t>
+            </a:r>
+          </a:p>
+        </p:txBody>
+      </p:sp>
+      <p:sp>
+        <p:nvSpPr>
+          <p:cNvPr id="18" name="TextBox 17"/>
+          <p:cNvSpPr txBox="1"/>
+          <p:nvPr/>
+        </p:nvSpPr>
+        <p:spPr>
+          <a:xfrm>
+            <a:off x="8257032" y="3931920"/>
+            <a:ext cx="3209544" cy="1188720"/>
+          </a:xfrm>
+          <a:prstGeom prst="rect">
+            <a:avLst/>
+          </a:prstGeom>
+          <a:noFill/>
+        </p:spPr>
+        <p:txBody>
+          <a:bodyPr wrap="square" lIns="9144" rIns="9144" tIns="0" bIns="0">
+            <a:spAutoFit/>
+          </a:bodyPr>
+          <a:lstStyle/>
+          <a:p>
+            <a:pPr>
+              <a:spcAft>
+                <a:spcPts val="900"/>
+              </a:spcAft>
+              <a:defRPr sz="1600" b="0">
+                <a:solidFill>
+                  <a:srgbClr val="52655F"/>
+                </a:solidFill>
+                <a:latin typeface="Manrope"/>
+              </a:defRPr>
+            </a:pPr>
+            <a:r>
+              <a:t>O valor reduz o saldo daquele local e período, sem alterar novembro.</a:t>
+            </a:r>
+          </a:p>
+        </p:txBody>
+      </p:sp>
+      <p:sp>
+        <p:nvSpPr>
+          <p:cNvPr id="19" name="TextBox 18"/>
+          <p:cNvSpPr txBox="1"/>
+          <p:nvPr/>
+        </p:nvSpPr>
+        <p:spPr>
+          <a:xfrm>
+            <a:off x="594360" y="5669280"/>
+            <a:ext cx="10881360" cy="548640"/>
           </a:xfrm>
           <a:prstGeom prst="rect">
             <a:avLst/>
@@ -14085,679 +14562,7 @@
               </a:defRPr>
             </a:pPr>
             <a:r>
-              <a:t>Consulta registrada como realizada.</a:t>
-            </a:r>
-          </a:p>
-        </p:txBody>
-      </p:sp>
-      <p:sp>
-        <p:nvSpPr>
-          <p:cNvPr id="15" name="Rounded Rectangle 14"/>
-          <p:cNvSpPr/>
-          <p:nvPr/>
-        </p:nvSpPr>
-        <p:spPr>
-          <a:xfrm>
-            <a:off x="8092440" y="2468880"/>
-            <a:ext cx="3611880" cy="1463040"/>
-          </a:xfrm>
-          <a:prstGeom prst="roundRect">
-            <a:avLst>
-              <a:gd name="adj" fmla="val 12000"/>
-            </a:avLst>
-          </a:prstGeom>
-          <a:solidFill>
-            <a:srgbClr val="FFFFFF"/>
-          </a:solidFill>
-          <a:ln>
-            <a:solidFill>
-              <a:srgbClr val="D5E0DC"/>
-            </a:solidFill>
-          </a:ln>
-        </p:spPr>
-        <p:style>
-          <a:lnRef idx="1">
-            <a:schemeClr val="accent1"/>
-          </a:lnRef>
-          <a:fillRef idx="3">
-            <a:schemeClr val="accent1"/>
-          </a:fillRef>
-          <a:effectRef idx="2">
-            <a:schemeClr val="accent1"/>
-          </a:effectRef>
-          <a:fontRef idx="minor">
-            <a:schemeClr val="lt1"/>
-          </a:fontRef>
-        </p:style>
-        <p:txBody>
-          <a:bodyPr rtlCol="0" anchor="ctr"/>
-          <a:lstStyle/>
-          <a:p>
-            <a:pPr algn="ctr"/>
-          </a:p>
-        </p:txBody>
-      </p:sp>
-      <p:sp>
-        <p:nvSpPr>
-          <p:cNvPr id="16" name="Rectangle 15"/>
-          <p:cNvSpPr/>
-          <p:nvPr/>
-        </p:nvSpPr>
-        <p:spPr>
-          <a:xfrm>
-            <a:off x="8247888" y="2651760"/>
-            <a:ext cx="91440" cy="365760"/>
-          </a:xfrm>
-          <a:prstGeom prst="rect">
-            <a:avLst/>
-          </a:prstGeom>
-          <a:solidFill>
-            <a:srgbClr val="C98512"/>
-          </a:solidFill>
-          <a:ln>
-            <a:noFill/>
-          </a:ln>
-        </p:spPr>
-        <p:style>
-          <a:lnRef idx="1">
-            <a:schemeClr val="accent1"/>
-          </a:lnRef>
-          <a:fillRef idx="3">
-            <a:schemeClr val="accent1"/>
-          </a:fillRef>
-          <a:effectRef idx="2">
-            <a:schemeClr val="accent1"/>
-          </a:effectRef>
-          <a:fontRef idx="minor">
-            <a:schemeClr val="lt1"/>
-          </a:fontRef>
-        </p:style>
-        <p:txBody>
-          <a:bodyPr rtlCol="0" anchor="ctr"/>
-          <a:lstStyle/>
-          <a:p>
-            <a:pPr algn="ctr"/>
-          </a:p>
-        </p:txBody>
-      </p:sp>
-      <p:sp>
-        <p:nvSpPr>
-          <p:cNvPr id="17" name="TextBox 16"/>
-          <p:cNvSpPr txBox="1"/>
-          <p:nvPr/>
-        </p:nvSpPr>
-        <p:spPr>
-          <a:xfrm>
-            <a:off x="8485632" y="2651760"/>
-            <a:ext cx="2971800" cy="411480"/>
-          </a:xfrm>
-          <a:prstGeom prst="rect">
-            <a:avLst/>
-          </a:prstGeom>
-          <a:noFill/>
-        </p:spPr>
-        <p:txBody>
-          <a:bodyPr wrap="square" lIns="9144" rIns="9144" tIns="0" bIns="0">
-            <a:spAutoFit/>
-          </a:bodyPr>
-          <a:lstStyle/>
-          <a:p>
-            <a:pPr>
-              <a:spcAft>
-                <a:spcPts val="900"/>
-              </a:spcAft>
-              <a:defRPr sz="2100" b="1">
-                <a:solidFill>
-                  <a:srgbClr val="0E1F1B"/>
-                </a:solidFill>
-                <a:latin typeface="Manrope"/>
-              </a:defRPr>
-            </a:pPr>
-            <a:r>
-              <a:t>A faturar</a:t>
-            </a:r>
-          </a:p>
-        </p:txBody>
-      </p:sp>
-      <p:sp>
-        <p:nvSpPr>
-          <p:cNvPr id="18" name="TextBox 17"/>
-          <p:cNvSpPr txBox="1"/>
-          <p:nvPr/>
-        </p:nvSpPr>
-        <p:spPr>
-          <a:xfrm>
-            <a:off x="8275320" y="3246120"/>
-            <a:ext cx="3246120" cy="548640"/>
-          </a:xfrm>
-          <a:prstGeom prst="rect">
-            <a:avLst/>
-          </a:prstGeom>
-          <a:noFill/>
-        </p:spPr>
-        <p:txBody>
-          <a:bodyPr wrap="square" lIns="9144" rIns="9144" tIns="0" bIns="0">
-            <a:spAutoFit/>
-          </a:bodyPr>
-          <a:lstStyle/>
-          <a:p>
-            <a:pPr>
-              <a:spcAft>
-                <a:spcPts val="900"/>
-              </a:spcAft>
-              <a:defRPr sz="1400" b="0">
-                <a:solidFill>
-                  <a:srgbClr val="52655F"/>
-                </a:solidFill>
-                <a:latin typeface="Manrope"/>
-              </a:defRPr>
-            </a:pPr>
-            <a:r>
-              <a:t>Pendente de faturamento.</a:t>
-            </a:r>
-          </a:p>
-        </p:txBody>
-      </p:sp>
-      <p:sp>
-        <p:nvSpPr>
-          <p:cNvPr id="19" name="Rounded Rectangle 18"/>
-          <p:cNvSpPr/>
-          <p:nvPr/>
-        </p:nvSpPr>
-        <p:spPr>
-          <a:xfrm>
-            <a:off x="502920" y="4160520"/>
-            <a:ext cx="3611880" cy="1463040"/>
-          </a:xfrm>
-          <a:prstGeom prst="roundRect">
-            <a:avLst>
-              <a:gd name="adj" fmla="val 12000"/>
-            </a:avLst>
-          </a:prstGeom>
-          <a:solidFill>
-            <a:srgbClr val="FFFFFF"/>
-          </a:solidFill>
-          <a:ln>
-            <a:solidFill>
-              <a:srgbClr val="D5E0DC"/>
-            </a:solidFill>
-          </a:ln>
-        </p:spPr>
-        <p:style>
-          <a:lnRef idx="1">
-            <a:schemeClr val="accent1"/>
-          </a:lnRef>
-          <a:fillRef idx="3">
-            <a:schemeClr val="accent1"/>
-          </a:fillRef>
-          <a:effectRef idx="2">
-            <a:schemeClr val="accent1"/>
-          </a:effectRef>
-          <a:fontRef idx="minor">
-            <a:schemeClr val="lt1"/>
-          </a:fontRef>
-        </p:style>
-        <p:txBody>
-          <a:bodyPr rtlCol="0" anchor="ctr"/>
-          <a:lstStyle/>
-          <a:p>
-            <a:pPr algn="ctr"/>
-          </a:p>
-        </p:txBody>
-      </p:sp>
-      <p:sp>
-        <p:nvSpPr>
-          <p:cNvPr id="20" name="Rectangle 19"/>
-          <p:cNvSpPr/>
-          <p:nvPr/>
-        </p:nvSpPr>
-        <p:spPr>
-          <a:xfrm>
-            <a:off x="658368" y="4343400"/>
-            <a:ext cx="91440" cy="365760"/>
-          </a:xfrm>
-          <a:prstGeom prst="rect">
-            <a:avLst/>
-          </a:prstGeom>
-          <a:solidFill>
-            <a:srgbClr val="2F6FB5"/>
-          </a:solidFill>
-          <a:ln>
-            <a:noFill/>
-          </a:ln>
-        </p:spPr>
-        <p:style>
-          <a:lnRef idx="1">
-            <a:schemeClr val="accent1"/>
-          </a:lnRef>
-          <a:fillRef idx="3">
-            <a:schemeClr val="accent1"/>
-          </a:fillRef>
-          <a:effectRef idx="2">
-            <a:schemeClr val="accent1"/>
-          </a:effectRef>
-          <a:fontRef idx="minor">
-            <a:schemeClr val="lt1"/>
-          </a:fontRef>
-        </p:style>
-        <p:txBody>
-          <a:bodyPr rtlCol="0" anchor="ctr"/>
-          <a:lstStyle/>
-          <a:p>
-            <a:pPr algn="ctr"/>
-          </a:p>
-        </p:txBody>
-      </p:sp>
-      <p:sp>
-        <p:nvSpPr>
-          <p:cNvPr id="21" name="TextBox 20"/>
-          <p:cNvSpPr txBox="1"/>
-          <p:nvPr/>
-        </p:nvSpPr>
-        <p:spPr>
-          <a:xfrm>
-            <a:off x="896112" y="4343400"/>
-            <a:ext cx="2971800" cy="411480"/>
-          </a:xfrm>
-          <a:prstGeom prst="rect">
-            <a:avLst/>
-          </a:prstGeom>
-          <a:noFill/>
-        </p:spPr>
-        <p:txBody>
-          <a:bodyPr wrap="square" lIns="9144" rIns="9144" tIns="0" bIns="0">
-            <a:spAutoFit/>
-          </a:bodyPr>
-          <a:lstStyle/>
-          <a:p>
-            <a:pPr>
-              <a:spcAft>
-                <a:spcPts val="900"/>
-              </a:spcAft>
-              <a:defRPr sz="2100" b="1">
-                <a:solidFill>
-                  <a:srgbClr val="0E1F1B"/>
-                </a:solidFill>
-                <a:latin typeface="Manrope"/>
-              </a:defRPr>
-            </a:pPr>
-            <a:r>
-              <a:t>Faturado</a:t>
-            </a:r>
-          </a:p>
-        </p:txBody>
-      </p:sp>
-      <p:sp>
-        <p:nvSpPr>
-          <p:cNvPr id="22" name="TextBox 21"/>
-          <p:cNvSpPr txBox="1"/>
-          <p:nvPr/>
-        </p:nvSpPr>
-        <p:spPr>
-          <a:xfrm>
-            <a:off x="685800" y="4937760"/>
-            <a:ext cx="3246120" cy="548640"/>
-          </a:xfrm>
-          <a:prstGeom prst="rect">
-            <a:avLst/>
-          </a:prstGeom>
-          <a:noFill/>
-        </p:spPr>
-        <p:txBody>
-          <a:bodyPr wrap="square" lIns="9144" rIns="9144" tIns="0" bIns="0">
-            <a:spAutoFit/>
-          </a:bodyPr>
-          <a:lstStyle/>
-          <a:p>
-            <a:pPr>
-              <a:spcAft>
-                <a:spcPts val="900"/>
-              </a:spcAft>
-              <a:defRPr sz="1400" b="0">
-                <a:solidFill>
-                  <a:srgbClr val="52655F"/>
-                </a:solidFill>
-                <a:latin typeface="Manrope"/>
-              </a:defRPr>
-            </a:pPr>
-            <a:r>
-              <a:t>Faturamento registrado.</a:t>
-            </a:r>
-          </a:p>
-        </p:txBody>
-      </p:sp>
-      <p:sp>
-        <p:nvSpPr>
-          <p:cNvPr id="23" name="Rounded Rectangle 22"/>
-          <p:cNvSpPr/>
-          <p:nvPr/>
-        </p:nvSpPr>
-        <p:spPr>
-          <a:xfrm>
-            <a:off x="4297680" y="4160520"/>
-            <a:ext cx="3611880" cy="1463040"/>
-          </a:xfrm>
-          <a:prstGeom prst="roundRect">
-            <a:avLst>
-              <a:gd name="adj" fmla="val 12000"/>
-            </a:avLst>
-          </a:prstGeom>
-          <a:solidFill>
-            <a:srgbClr val="FFFFFF"/>
-          </a:solidFill>
-          <a:ln>
-            <a:solidFill>
-              <a:srgbClr val="D5E0DC"/>
-            </a:solidFill>
-          </a:ln>
-        </p:spPr>
-        <p:style>
-          <a:lnRef idx="1">
-            <a:schemeClr val="accent1"/>
-          </a:lnRef>
-          <a:fillRef idx="3">
-            <a:schemeClr val="accent1"/>
-          </a:fillRef>
-          <a:effectRef idx="2">
-            <a:schemeClr val="accent1"/>
-          </a:effectRef>
-          <a:fontRef idx="minor">
-            <a:schemeClr val="lt1"/>
-          </a:fontRef>
-        </p:style>
-        <p:txBody>
-          <a:bodyPr rtlCol="0" anchor="ctr"/>
-          <a:lstStyle/>
-          <a:p>
-            <a:pPr algn="ctr"/>
-          </a:p>
-        </p:txBody>
-      </p:sp>
-      <p:sp>
-        <p:nvSpPr>
-          <p:cNvPr id="24" name="Rectangle 23"/>
-          <p:cNvSpPr/>
-          <p:nvPr/>
-        </p:nvSpPr>
-        <p:spPr>
-          <a:xfrm>
-            <a:off x="4453128" y="4343400"/>
-            <a:ext cx="91440" cy="365760"/>
-          </a:xfrm>
-          <a:prstGeom prst="rect">
-            <a:avLst/>
-          </a:prstGeom>
-          <a:solidFill>
-            <a:srgbClr val="C6423A"/>
-          </a:solidFill>
-          <a:ln>
-            <a:noFill/>
-          </a:ln>
-        </p:spPr>
-        <p:style>
-          <a:lnRef idx="1">
-            <a:schemeClr val="accent1"/>
-          </a:lnRef>
-          <a:fillRef idx="3">
-            <a:schemeClr val="accent1"/>
-          </a:fillRef>
-          <a:effectRef idx="2">
-            <a:schemeClr val="accent1"/>
-          </a:effectRef>
-          <a:fontRef idx="minor">
-            <a:schemeClr val="lt1"/>
-          </a:fontRef>
-        </p:style>
-        <p:txBody>
-          <a:bodyPr rtlCol="0" anchor="ctr"/>
-          <a:lstStyle/>
-          <a:p>
-            <a:pPr algn="ctr"/>
-          </a:p>
-        </p:txBody>
-      </p:sp>
-      <p:sp>
-        <p:nvSpPr>
-          <p:cNvPr id="25" name="TextBox 24"/>
-          <p:cNvSpPr txBox="1"/>
-          <p:nvPr/>
-        </p:nvSpPr>
-        <p:spPr>
-          <a:xfrm>
-            <a:off x="4690872" y="4343400"/>
-            <a:ext cx="2971800" cy="411480"/>
-          </a:xfrm>
-          <a:prstGeom prst="rect">
-            <a:avLst/>
-          </a:prstGeom>
-          <a:noFill/>
-        </p:spPr>
-        <p:txBody>
-          <a:bodyPr wrap="square" lIns="9144" rIns="9144" tIns="0" bIns="0">
-            <a:spAutoFit/>
-          </a:bodyPr>
-          <a:lstStyle/>
-          <a:p>
-            <a:pPr>
-              <a:spcAft>
-                <a:spcPts val="900"/>
-              </a:spcAft>
-              <a:defRPr sz="2100" b="1">
-                <a:solidFill>
-                  <a:srgbClr val="0E1F1B"/>
-                </a:solidFill>
-                <a:latin typeface="Manrope"/>
-              </a:defRPr>
-            </a:pPr>
-            <a:r>
-              <a:t>Glosado</a:t>
-            </a:r>
-          </a:p>
-        </p:txBody>
-      </p:sp>
-      <p:sp>
-        <p:nvSpPr>
-          <p:cNvPr id="26" name="TextBox 25"/>
-          <p:cNvSpPr txBox="1"/>
-          <p:nvPr/>
-        </p:nvSpPr>
-        <p:spPr>
-          <a:xfrm>
-            <a:off x="4480560" y="4937760"/>
-            <a:ext cx="3246120" cy="548640"/>
-          </a:xfrm>
-          <a:prstGeom prst="rect">
-            <a:avLst/>
-          </a:prstGeom>
-          <a:noFill/>
-        </p:spPr>
-        <p:txBody>
-          <a:bodyPr wrap="square" lIns="9144" rIns="9144" tIns="0" bIns="0">
-            <a:spAutoFit/>
-          </a:bodyPr>
-          <a:lstStyle/>
-          <a:p>
-            <a:pPr>
-              <a:spcAft>
-                <a:spcPts val="900"/>
-              </a:spcAft>
-              <a:defRPr sz="1400" b="0">
-                <a:solidFill>
-                  <a:srgbClr val="52655F"/>
-                </a:solidFill>
-                <a:latin typeface="Manrope"/>
-              </a:defRPr>
-            </a:pPr>
-            <a:r>
-              <a:t>Glosa total ou parcial para conferir.</a:t>
-            </a:r>
-          </a:p>
-        </p:txBody>
-      </p:sp>
-      <p:sp>
-        <p:nvSpPr>
-          <p:cNvPr id="27" name="Rounded Rectangle 26"/>
-          <p:cNvSpPr/>
-          <p:nvPr/>
-        </p:nvSpPr>
-        <p:spPr>
-          <a:xfrm>
-            <a:off x="8092440" y="4160520"/>
-            <a:ext cx="3611880" cy="1463040"/>
-          </a:xfrm>
-          <a:prstGeom prst="roundRect">
-            <a:avLst>
-              <a:gd name="adj" fmla="val 12000"/>
-            </a:avLst>
-          </a:prstGeom>
-          <a:solidFill>
-            <a:srgbClr val="FFFFFF"/>
-          </a:solidFill>
-          <a:ln>
-            <a:solidFill>
-              <a:srgbClr val="D5E0DC"/>
-            </a:solidFill>
-          </a:ln>
-        </p:spPr>
-        <p:style>
-          <a:lnRef idx="1">
-            <a:schemeClr val="accent1"/>
-          </a:lnRef>
-          <a:fillRef idx="3">
-            <a:schemeClr val="accent1"/>
-          </a:fillRef>
-          <a:effectRef idx="2">
-            <a:schemeClr val="accent1"/>
-          </a:effectRef>
-          <a:fontRef idx="minor">
-            <a:schemeClr val="lt1"/>
-          </a:fontRef>
-        </p:style>
-        <p:txBody>
-          <a:bodyPr rtlCol="0" anchor="ctr"/>
-          <a:lstStyle/>
-          <a:p>
-            <a:pPr algn="ctr"/>
-          </a:p>
-        </p:txBody>
-      </p:sp>
-      <p:sp>
-        <p:nvSpPr>
-          <p:cNvPr id="28" name="Rectangle 27"/>
-          <p:cNvSpPr/>
-          <p:nvPr/>
-        </p:nvSpPr>
-        <p:spPr>
-          <a:xfrm>
-            <a:off x="8247888" y="4343400"/>
-            <a:ext cx="91440" cy="365760"/>
-          </a:xfrm>
-          <a:prstGeom prst="rect">
-            <a:avLst/>
-          </a:prstGeom>
-          <a:solidFill>
-            <a:srgbClr val="0B7A66"/>
-          </a:solidFill>
-          <a:ln>
-            <a:noFill/>
-          </a:ln>
-        </p:spPr>
-        <p:style>
-          <a:lnRef idx="1">
-            <a:schemeClr val="accent1"/>
-          </a:lnRef>
-          <a:fillRef idx="3">
-            <a:schemeClr val="accent1"/>
-          </a:fillRef>
-          <a:effectRef idx="2">
-            <a:schemeClr val="accent1"/>
-          </a:effectRef>
-          <a:fontRef idx="minor">
-            <a:schemeClr val="lt1"/>
-          </a:fontRef>
-        </p:style>
-        <p:txBody>
-          <a:bodyPr rtlCol="0" anchor="ctr"/>
-          <a:lstStyle/>
-          <a:p>
-            <a:pPr algn="ctr"/>
-          </a:p>
-        </p:txBody>
-      </p:sp>
-      <p:sp>
-        <p:nvSpPr>
-          <p:cNvPr id="29" name="TextBox 28"/>
-          <p:cNvSpPr txBox="1"/>
-          <p:nvPr/>
-        </p:nvSpPr>
-        <p:spPr>
-          <a:xfrm>
-            <a:off x="8485632" y="4343400"/>
-            <a:ext cx="2971800" cy="411480"/>
-          </a:xfrm>
-          <a:prstGeom prst="rect">
-            <a:avLst/>
-          </a:prstGeom>
-          <a:noFill/>
-        </p:spPr>
-        <p:txBody>
-          <a:bodyPr wrap="square" lIns="9144" rIns="9144" tIns="0" bIns="0">
-            <a:spAutoFit/>
-          </a:bodyPr>
-          <a:lstStyle/>
-          <a:p>
-            <a:pPr>
-              <a:spcAft>
-                <a:spcPts val="900"/>
-              </a:spcAft>
-              <a:defRPr sz="2100" b="1">
-                <a:solidFill>
-                  <a:srgbClr val="0E1F1B"/>
-                </a:solidFill>
-                <a:latin typeface="Manrope"/>
-              </a:defRPr>
-            </a:pPr>
-            <a:r>
-              <a:t>Pago</a:t>
-            </a:r>
-          </a:p>
-        </p:txBody>
-      </p:sp>
-      <p:sp>
-        <p:nvSpPr>
-          <p:cNvPr id="30" name="TextBox 29"/>
-          <p:cNvSpPr txBox="1"/>
-          <p:nvPr/>
-        </p:nvSpPr>
-        <p:spPr>
-          <a:xfrm>
-            <a:off x="8275320" y="4937760"/>
-            <a:ext cx="3246120" cy="548640"/>
-          </a:xfrm>
-          <a:prstGeom prst="rect">
-            <a:avLst/>
-          </a:prstGeom>
-          <a:noFill/>
-        </p:spPr>
-        <p:txBody>
-          <a:bodyPr wrap="square" lIns="9144" rIns="9144" tIns="0" bIns="0">
-            <a:spAutoFit/>
-          </a:bodyPr>
-          <a:lstStyle/>
-          <a:p>
-            <a:pPr>
-              <a:spcAft>
-                <a:spcPts val="900"/>
-              </a:spcAft>
-              <a:defRPr sz="1400" b="0">
-                <a:solidFill>
-                  <a:srgbClr val="52655F"/>
-                </a:solidFill>
-                <a:latin typeface="Manrope"/>
-              </a:defRPr>
-            </a:pPr>
-            <a:r>
-              <a:t>Repasse marcado como recebido.</a:t>
+              <a:t>O lançamento abate o saldo daquele local e convênio; não marca consultas individuais como pagas.</a:t>
             </a:r>
           </a:p>
         </p:txBody>
@@ -14822,7 +14627,7 @@
               </a:defRPr>
             </a:pPr>
             <a:r>
-              <a:t>ENTRADA DE DADOS E CUIDADO COM A INFORMAÇÃO</a:t>
+              <a:t>AJUSTES SIMPLES</a:t>
             </a:r>
           </a:p>
         </p:txBody>
@@ -14861,7 +14666,7 @@
               </a:defRPr>
             </a:pPr>
             <a:r>
-              <a:t>Importe apenas o necessário.</a:t>
+              <a:t>Uma configuração para cada rotina.</a:t>
             </a:r>
           </a:p>
         </p:txBody>
@@ -14900,7 +14705,7 @@
               </a:defRPr>
             </a:pPr>
             <a:r>
-              <a:t>O MVP já aceita CSV/XLSX; a sincronização automática com o MV ainda não foi implementada.</a:t>
+              <a:t>Locais e convênios podem ter honorários diferentes.</a:t>
             </a:r>
           </a:p>
         </p:txBody>
@@ -14939,7 +14744,7 @@
               </a:defRPr>
             </a:pPr>
             <a:r>
-              <a:t>REPASSE MED  /  Demonstração com dados fictícios · Out/2026</a:t>
+              <a:t>HonorMed  /  Controle pessoal · dados fictícios · Out/2026</a:t>
             </a:r>
           </a:p>
         </p:txBody>
@@ -14992,7 +14797,7 @@
         <p:spPr>
           <a:xfrm>
             <a:off x="502920" y="2560320"/>
-            <a:ext cx="5468112" cy="2743200"/>
+            <a:ext cx="3611880" cy="2743200"/>
           </a:xfrm>
           <a:prstGeom prst="roundRect">
             <a:avLst>
@@ -15039,7 +14844,7 @@
         <p:spPr>
           <a:xfrm>
             <a:off x="704088" y="2743200"/>
-            <a:ext cx="5065776" cy="320040"/>
+            <a:ext cx="3209544" cy="320040"/>
           </a:xfrm>
           <a:prstGeom prst="rect">
             <a:avLst/>
@@ -15064,7 +14869,7 @@
               </a:defRPr>
             </a:pPr>
             <a:r>
-              <a:t>DISPONÍVEL NO MVP</a:t>
+              <a:t>ONDE ATENDE</a:t>
             </a:r>
           </a:p>
         </p:txBody>
@@ -15078,7 +14883,7 @@
         <p:spPr>
           <a:xfrm>
             <a:off x="704088" y="3200400"/>
-            <a:ext cx="5065776" cy="640080"/>
+            <a:ext cx="3209544" cy="640080"/>
           </a:xfrm>
           <a:prstGeom prst="rect">
             <a:avLst/>
@@ -15103,7 +14908,7 @@
               </a:defRPr>
             </a:pPr>
             <a:r>
-              <a:t>Fluxo de importação</a:t>
+              <a:t>Seus locais</a:t>
             </a:r>
           </a:p>
         </p:txBody>
@@ -15117,7 +14922,7 @@
         <p:spPr>
           <a:xfrm>
             <a:off x="704088" y="3931920"/>
-            <a:ext cx="5065776" cy="1188720"/>
+            <a:ext cx="3209544" cy="1188720"/>
           </a:xfrm>
           <a:prstGeom prst="rect">
             <a:avLst/>
@@ -15142,7 +14947,7 @@
               </a:defRPr>
             </a:pPr>
             <a:r>
-              <a:t>Escolher arquivo → mapear colunas → validar → importar → conferir a previsão recalculada.</a:t>
+              <a:t>Cadastre consultórios, clínicas ou hospitais pelos nomes que usa.</a:t>
             </a:r>
           </a:p>
         </p:txBody>
@@ -15155,8 +14960,8 @@
         </p:nvSpPr>
         <p:spPr>
           <a:xfrm>
-            <a:off x="6172200" y="2560320"/>
-            <a:ext cx="5468112" cy="2743200"/>
+            <a:off x="4279392" y="2560320"/>
+            <a:ext cx="3611880" cy="2743200"/>
           </a:xfrm>
           <a:prstGeom prst="roundRect">
             <a:avLst>
@@ -15202,8 +15007,8 @@
         </p:nvSpPr>
         <p:spPr>
           <a:xfrm>
-            <a:off x="6373368" y="2743200"/>
-            <a:ext cx="5065776" cy="320040"/>
+            <a:off x="4480559" y="2743200"/>
+            <a:ext cx="3209544" cy="320040"/>
           </a:xfrm>
           <a:prstGeom prst="rect">
             <a:avLst/>
@@ -15228,7 +15033,7 @@
               </a:defRPr>
             </a:pPr>
             <a:r>
-              <a:t>DADOS MÍNIMOS</a:t>
+              <a:t>O QUE ATENDE</a:t>
             </a:r>
           </a:p>
         </p:txBody>
@@ -15241,8 +15046,8 @@
         </p:nvSpPr>
         <p:spPr>
           <a:xfrm>
-            <a:off x="6373368" y="3200400"/>
-            <a:ext cx="5065776" cy="640080"/>
+            <a:off x="4480559" y="3200400"/>
+            <a:ext cx="3209544" cy="640080"/>
           </a:xfrm>
           <a:prstGeom prst="rect">
             <a:avLst/>
@@ -15267,7 +15072,7 @@
               </a:defRPr>
             </a:pPr>
             <a:r>
-              <a:t>Campos financeiros</a:t>
+              <a:t>Seus convênios</a:t>
             </a:r>
           </a:p>
         </p:txBody>
@@ -15280,8 +15085,8 @@
         </p:nvSpPr>
         <p:spPr>
           <a:xfrm>
-            <a:off x="6373368" y="3931920"/>
-            <a:ext cx="5065776" cy="1188720"/>
+            <a:off x="4480559" y="3931920"/>
+            <a:ext cx="3209544" cy="1188720"/>
           </a:xfrm>
           <a:prstGeom prst="rect">
             <a:avLst/>
@@ -15306,14 +15111,178 @@
               </a:defRPr>
             </a:pPr>
             <a:r>
-              <a:t>Código de atendimento, convênio, data, status e valor opcional da consulta. Sem nome ou CPF de paciente.</a:t>
-            </a:r>
-          </a:p>
-        </p:txBody>
-      </p:sp>
-      <p:sp>
-        <p:nvSpPr>
-          <p:cNvPr id="15" name="TextBox 14"/>
+              <a:t>Inclua Particular quando fizer consultas particulares.</a:t>
+            </a:r>
+          </a:p>
+        </p:txBody>
+      </p:sp>
+      <p:sp>
+        <p:nvSpPr>
+          <p:cNvPr id="15" name="Rounded Rectangle 14"/>
+          <p:cNvSpPr/>
+          <p:nvPr/>
+        </p:nvSpPr>
+        <p:spPr>
+          <a:xfrm>
+            <a:off x="8055864" y="2560320"/>
+            <a:ext cx="3611880" cy="2743200"/>
+          </a:xfrm>
+          <a:prstGeom prst="roundRect">
+            <a:avLst>
+              <a:gd name="adj" fmla="val 12000"/>
+            </a:avLst>
+          </a:prstGeom>
+          <a:solidFill>
+            <a:srgbClr val="FFFFFF"/>
+          </a:solidFill>
+          <a:ln>
+            <a:solidFill>
+              <a:srgbClr val="D5E0DC"/>
+            </a:solidFill>
+          </a:ln>
+        </p:spPr>
+        <p:style>
+          <a:lnRef idx="1">
+            <a:schemeClr val="accent1"/>
+          </a:lnRef>
+          <a:fillRef idx="3">
+            <a:schemeClr val="accent1"/>
+          </a:fillRef>
+          <a:effectRef idx="2">
+            <a:schemeClr val="accent1"/>
+          </a:effectRef>
+          <a:fontRef idx="minor">
+            <a:schemeClr val="lt1"/>
+          </a:fontRef>
+        </p:style>
+        <p:txBody>
+          <a:bodyPr rtlCol="0" anchor="ctr"/>
+          <a:lstStyle/>
+          <a:p>
+            <a:pPr algn="ctr"/>
+          </a:p>
+        </p:txBody>
+      </p:sp>
+      <p:sp>
+        <p:nvSpPr>
+          <p:cNvPr id="16" name="TextBox 15"/>
+          <p:cNvSpPr txBox="1"/>
+          <p:nvPr/>
+        </p:nvSpPr>
+        <p:spPr>
+          <a:xfrm>
+            <a:off x="8257032" y="2743200"/>
+            <a:ext cx="3209544" cy="320040"/>
+          </a:xfrm>
+          <a:prstGeom prst="rect">
+            <a:avLst/>
+          </a:prstGeom>
+          <a:noFill/>
+        </p:spPr>
+        <p:txBody>
+          <a:bodyPr wrap="square" lIns="9144" rIns="9144" tIns="0" bIns="0">
+            <a:spAutoFit/>
+          </a:bodyPr>
+          <a:lstStyle/>
+          <a:p>
+            <a:pPr>
+              <a:spcAft>
+                <a:spcPts val="900"/>
+              </a:spcAft>
+              <a:defRPr sz="1100" b="1">
+                <a:solidFill>
+                  <a:srgbClr val="0B7A66"/>
+                </a:solidFill>
+                <a:latin typeface="Manrope"/>
+              </a:defRPr>
+            </a:pPr>
+            <a:r>
+              <a:t>QUANTO ESPERA</a:t>
+            </a:r>
+          </a:p>
+        </p:txBody>
+      </p:sp>
+      <p:sp>
+        <p:nvSpPr>
+          <p:cNvPr id="17" name="TextBox 16"/>
+          <p:cNvSpPr txBox="1"/>
+          <p:nvPr/>
+        </p:nvSpPr>
+        <p:spPr>
+          <a:xfrm>
+            <a:off x="8257032" y="3200400"/>
+            <a:ext cx="3209544" cy="640080"/>
+          </a:xfrm>
+          <a:prstGeom prst="rect">
+            <a:avLst/>
+          </a:prstGeom>
+          <a:noFill/>
+        </p:spPr>
+        <p:txBody>
+          <a:bodyPr wrap="square" lIns="9144" rIns="9144" tIns="0" bIns="0">
+            <a:spAutoFit/>
+          </a:bodyPr>
+          <a:lstStyle/>
+          <a:p>
+            <a:pPr>
+              <a:spcAft>
+                <a:spcPts val="900"/>
+              </a:spcAft>
+              <a:defRPr sz="2300" b="1">
+                <a:solidFill>
+                  <a:srgbClr val="0E1F1B"/>
+                </a:solidFill>
+                <a:latin typeface="Bricolage Grotesque"/>
+              </a:defRPr>
+            </a:pPr>
+            <a:r>
+              <a:t>Seus honorários</a:t>
+            </a:r>
+          </a:p>
+        </p:txBody>
+      </p:sp>
+      <p:sp>
+        <p:nvSpPr>
+          <p:cNvPr id="18" name="TextBox 17"/>
+          <p:cNvSpPr txBox="1"/>
+          <p:nvPr/>
+        </p:nvSpPr>
+        <p:spPr>
+          <a:xfrm>
+            <a:off x="8257032" y="3931920"/>
+            <a:ext cx="3209544" cy="1188720"/>
+          </a:xfrm>
+          <a:prstGeom prst="rect">
+            <a:avLst/>
+          </a:prstGeom>
+          <a:noFill/>
+        </p:spPr>
+        <p:txBody>
+          <a:bodyPr wrap="square" lIns="9144" rIns="9144" tIns="0" bIns="0">
+            <a:spAutoFit/>
+          </a:bodyPr>
+          <a:lstStyle/>
+          <a:p>
+            <a:pPr>
+              <a:spcAft>
+                <a:spcPts val="900"/>
+              </a:spcAft>
+              <a:defRPr sz="1600" b="0">
+                <a:solidFill>
+                  <a:srgbClr val="52655F"/>
+                </a:solidFill>
+                <a:latin typeface="Manrope"/>
+              </a:defRPr>
+            </a:pPr>
+            <a:r>
+              <a:t>Preencha por local e convênio. Novos registros usam o valor configurado.</a:t>
+            </a:r>
+          </a:p>
+        </p:txBody>
+      </p:sp>
+      <p:sp>
+        <p:nvSpPr>
+          <p:cNvPr id="19" name="TextBox 18"/>
           <p:cNvSpPr txBox="1"/>
           <p:nvPr/>
         </p:nvSpPr>
@@ -15345,7 +15314,7 @@
               </a:defRPr>
             </a:pPr>
             <a:r>
-              <a:t>Até 1.000 linhas por arquivo. O acesso deve ser individual; permissões e operação real exigem validação.</a:t>
+              <a:t>Salvar honorário também preenche registros ainda sem valor. A tela avisa esse efeito.</a:t>
             </a:r>
           </a:p>
         </p:txBody>
